--- a/Pregrado/Investigacion en ciencia y tecnologia/Clases/Presentacion del Curso - Investigacion Ciencia y Tecnologia.pptx
+++ b/Pregrado/Investigacion en ciencia y tecnologia/Clases/Presentacion del Curso - Investigacion Ciencia y Tecnologia.pptx
@@ -3400,6 +3400,24 @@
               </a:rPr>
               <a:t>Jueves, 5:00 pm – 6:00 pm</a:t>
             </a:r>
+            <a:r>
+              <a:rPr sz="1500" b="0" i="0">
+                <a:solidFill>
+                  <a:srgbClr val="2B2B2B"/>
+                </a:solidFill>
+                <a:latin typeface="Calibri"/>
+              </a:rPr>
+              <a:t> · inicio efectivo </a:t>
+            </a:r>
+            <a:r>
+              <a:rPr sz="1500" b="1" i="0">
+                <a:solidFill>
+                  <a:srgbClr val="2B2B2B"/>
+                </a:solidFill>
+                <a:latin typeface="Calibri"/>
+              </a:rPr>
+              <a:t>5:10 pm</a:t>
+            </a:r>
           </a:p>
           <a:p>
             <a:pPr>
@@ -3535,41 +3553,6 @@
                 <a:latin typeface="Calibri"/>
               </a:rPr>
               <a:t>.</a:t>
-            </a:r>
-          </a:p>
-        </p:txBody>
-      </p:sp>
-      <p:sp>
-        <p:nvSpPr>
-          <p:cNvPr id="7" name="TextBox 6"/>
-          <p:cNvSpPr txBox="1"/>
-          <p:nvPr/>
-        </p:nvSpPr>
-        <p:spPr>
-          <a:xfrm>
-            <a:off x="2194560" y="6446520"/>
-            <a:ext cx="5943600" cy="274320"/>
-          </a:xfrm>
-          <a:prstGeom prst="rect">
-            <a:avLst/>
-          </a:prstGeom>
-          <a:noFill/>
-        </p:spPr>
-        <p:txBody>
-          <a:bodyPr wrap="square" anchor="t" lIns="0" rIns="0" tIns="0" bIns="0">
-            <a:spAutoFit/>
-          </a:bodyPr>
-          <a:lstStyle/>
-          <a:p>
-            <a:pPr algn="l"/>
-            <a:r>
-              <a:rPr sz="1000" b="1" i="0">
-                <a:solidFill>
-                  <a:srgbClr val="8F989D"/>
-                </a:solidFill>
-                <a:latin typeface="Calibri"/>
-              </a:rPr>
-              <a:t>Inicio 5:10 pm</a:t>
             </a:r>
           </a:p>
         </p:txBody>
@@ -3851,7 +3834,7 @@
                 </a:solidFill>
                 <a:latin typeface="Calibri"/>
               </a:rPr>
-              <a:t> (archivo local): `Cursos/Plantilla_APA_CUN_Proyecto de grado.docx`.</a:t>
+              <a:t> (viene en tu carpeta del curso): `Recursos/Plantilla_APA_CUN_Proyecto de grado.docx`.</a:t>
             </a:r>
           </a:p>
           <a:p>
@@ -3876,7 +3859,7 @@
                 </a:solidFill>
                 <a:latin typeface="Calibri"/>
               </a:rPr>
-              <a:t>URL pública Plantilla APA:</a:t>
+              <a:t>Plantilla APA CUN (en tu carpeta):</a:t>
             </a:r>
             <a:r>
               <a:rPr sz="1600" b="0" i="0">
@@ -3885,7 +3868,7 @@
                 </a:solidFill>
                 <a:latin typeface="Calibri"/>
               </a:rPr>
-              <a:t> [URL Drive/Moodle de la Plantilla APA CUN — pendiente]</a:t>
+              <a:t> `Recursos/Plantilla_APA_CUN_Proyecto de grado.docx`</a:t>
             </a:r>
           </a:p>
           <a:p>
@@ -3995,41 +3978,6 @@
       <p:sp>
         <p:nvSpPr>
           <p:cNvPr id="5" name="TextBox 4"/>
-          <p:cNvSpPr txBox="1"/>
-          <p:nvPr/>
-        </p:nvSpPr>
-        <p:spPr>
-          <a:xfrm>
-            <a:off x="2194560" y="6446520"/>
-            <a:ext cx="5943600" cy="274320"/>
-          </a:xfrm>
-          <a:prstGeom prst="rect">
-            <a:avLst/>
-          </a:prstGeom>
-          <a:noFill/>
-        </p:spPr>
-        <p:txBody>
-          <a:bodyPr wrap="square" anchor="t" lIns="0" rIns="0" tIns="0" bIns="0">
-            <a:spAutoFit/>
-          </a:bodyPr>
-          <a:lstStyle/>
-          <a:p>
-            <a:pPr algn="l"/>
-            <a:r>
-              <a:rPr sz="1000" b="1" i="0">
-                <a:solidFill>
-                  <a:srgbClr val="8F989D"/>
-                </a:solidFill>
-                <a:latin typeface="Calibri"/>
-              </a:rPr>
-              <a:t>Inicio 5:10 pm</a:t>
-            </a:r>
-          </a:p>
-        </p:txBody>
-      </p:sp>
-      <p:sp>
-        <p:nvSpPr>
-          <p:cNvPr id="6" name="TextBox 5"/>
           <p:cNvSpPr txBox="1"/>
           <p:nvPr/>
         </p:nvSpPr>
@@ -4299,41 +4247,6 @@
           </a:p>
         </p:txBody>
       </p:sp>
-      <p:sp>
-        <p:nvSpPr>
-          <p:cNvPr id="7" name="TextBox 6"/>
-          <p:cNvSpPr txBox="1"/>
-          <p:nvPr/>
-        </p:nvSpPr>
-        <p:spPr>
-          <a:xfrm>
-            <a:off x="2194560" y="6446520"/>
-            <a:ext cx="5943600" cy="274320"/>
-          </a:xfrm>
-          <a:prstGeom prst="rect">
-            <a:avLst/>
-          </a:prstGeom>
-          <a:noFill/>
-        </p:spPr>
-        <p:txBody>
-          <a:bodyPr wrap="square" anchor="t" lIns="0" rIns="0" tIns="0" bIns="0">
-            <a:spAutoFit/>
-          </a:bodyPr>
-          <a:lstStyle/>
-          <a:p>
-            <a:pPr algn="l"/>
-            <a:r>
-              <a:rPr sz="1000" b="1" i="0">
-                <a:solidFill>
-                  <a:srgbClr val="8F989D"/>
-                </a:solidFill>
-                <a:latin typeface="Calibri"/>
-              </a:rPr>
-              <a:t>Inicio 5:10 pm</a:t>
-            </a:r>
-          </a:p>
-        </p:txBody>
-      </p:sp>
     </p:spTree>
   </p:cSld>
   <p:clrMapOvr>
@@ -4616,41 +4529,6 @@
         </p:nvSpPr>
         <p:spPr>
           <a:xfrm>
-            <a:off x="2194560" y="6446520"/>
-            <a:ext cx="5943600" cy="274320"/>
-          </a:xfrm>
-          <a:prstGeom prst="rect">
-            <a:avLst/>
-          </a:prstGeom>
-          <a:noFill/>
-        </p:spPr>
-        <p:txBody>
-          <a:bodyPr wrap="square" anchor="t" lIns="0" rIns="0" tIns="0" bIns="0">
-            <a:spAutoFit/>
-          </a:bodyPr>
-          <a:lstStyle/>
-          <a:p>
-            <a:pPr algn="l"/>
-            <a:r>
-              <a:rPr sz="1000" b="1" i="0">
-                <a:solidFill>
-                  <a:srgbClr val="8F989D"/>
-                </a:solidFill>
-                <a:latin typeface="Calibri"/>
-              </a:rPr>
-              <a:t>Inicio 5:10 pm</a:t>
-            </a:r>
-          </a:p>
-        </p:txBody>
-      </p:sp>
-      <p:sp>
-        <p:nvSpPr>
-          <p:cNvPr id="9" name="TextBox 8"/>
-          <p:cNvSpPr txBox="1"/>
-          <p:nvPr/>
-        </p:nvSpPr>
-        <p:spPr>
-          <a:xfrm>
             <a:off x="11094415" y="6446520"/>
             <a:ext cx="548640" cy="274320"/>
           </a:xfrm>
@@ -5141,41 +5019,6 @@
         </p:nvSpPr>
         <p:spPr>
           <a:xfrm>
-            <a:off x="2194560" y="6446520"/>
-            <a:ext cx="5943600" cy="274320"/>
-          </a:xfrm>
-          <a:prstGeom prst="rect">
-            <a:avLst/>
-          </a:prstGeom>
-          <a:noFill/>
-        </p:spPr>
-        <p:txBody>
-          <a:bodyPr wrap="square" anchor="t" lIns="0" rIns="0" tIns="0" bIns="0">
-            <a:spAutoFit/>
-          </a:bodyPr>
-          <a:lstStyle/>
-          <a:p>
-            <a:pPr algn="l"/>
-            <a:r>
-              <a:rPr sz="1000" b="1" i="0">
-                <a:solidFill>
-                  <a:srgbClr val="8F989D"/>
-                </a:solidFill>
-                <a:latin typeface="Calibri"/>
-              </a:rPr>
-              <a:t>Inicio 5:10 pm</a:t>
-            </a:r>
-          </a:p>
-        </p:txBody>
-      </p:sp>
-      <p:sp>
-        <p:nvSpPr>
-          <p:cNvPr id="11" name="TextBox 10"/>
-          <p:cNvSpPr txBox="1"/>
-          <p:nvPr/>
-        </p:nvSpPr>
-        <p:spPr>
-          <a:xfrm>
             <a:off x="11094415" y="6446520"/>
             <a:ext cx="548640" cy="274320"/>
           </a:xfrm>
@@ -5457,41 +5300,6 @@
         </p:nvSpPr>
         <p:spPr>
           <a:xfrm>
-            <a:off x="2194560" y="6446520"/>
-            <a:ext cx="5943600" cy="274320"/>
-          </a:xfrm>
-          <a:prstGeom prst="rect">
-            <a:avLst/>
-          </a:prstGeom>
-          <a:noFill/>
-        </p:spPr>
-        <p:txBody>
-          <a:bodyPr wrap="square" anchor="t" lIns="0" rIns="0" tIns="0" bIns="0">
-            <a:spAutoFit/>
-          </a:bodyPr>
-          <a:lstStyle/>
-          <a:p>
-            <a:pPr algn="l"/>
-            <a:r>
-              <a:rPr sz="1000" b="1" i="0">
-                <a:solidFill>
-                  <a:srgbClr val="8F989D"/>
-                </a:solidFill>
-                <a:latin typeface="Calibri"/>
-              </a:rPr>
-              <a:t>Inicio 5:10 pm</a:t>
-            </a:r>
-          </a:p>
-        </p:txBody>
-      </p:sp>
-      <p:sp>
-        <p:nvSpPr>
-          <p:cNvPr id="6" name="TextBox 5"/>
-          <p:cNvSpPr txBox="1"/>
-          <p:nvPr/>
-        </p:nvSpPr>
-        <p:spPr>
-          <a:xfrm>
             <a:off x="11094415" y="6446520"/>
             <a:ext cx="548640" cy="274320"/>
           </a:xfrm>
@@ -5757,41 +5565,6 @@
         </p:nvSpPr>
         <p:spPr>
           <a:xfrm>
-            <a:off x="2194560" y="6446520"/>
-            <a:ext cx="5943600" cy="274320"/>
-          </a:xfrm>
-          <a:prstGeom prst="rect">
-            <a:avLst/>
-          </a:prstGeom>
-          <a:noFill/>
-        </p:spPr>
-        <p:txBody>
-          <a:bodyPr wrap="square" anchor="t" lIns="0" rIns="0" tIns="0" bIns="0">
-            <a:spAutoFit/>
-          </a:bodyPr>
-          <a:lstStyle/>
-          <a:p>
-            <a:pPr algn="l"/>
-            <a:r>
-              <a:rPr sz="1000" b="1" i="0">
-                <a:solidFill>
-                  <a:srgbClr val="8F989D"/>
-                </a:solidFill>
-                <a:latin typeface="Calibri"/>
-              </a:rPr>
-              <a:t>Inicio 5:10 pm</a:t>
-            </a:r>
-          </a:p>
-        </p:txBody>
-      </p:sp>
-      <p:sp>
-        <p:nvSpPr>
-          <p:cNvPr id="6" name="TextBox 5"/>
-          <p:cNvSpPr txBox="1"/>
-          <p:nvPr/>
-        </p:nvSpPr>
-        <p:spPr>
-          <a:xfrm>
             <a:off x="11094415" y="6446520"/>
             <a:ext cx="548640" cy="274320"/>
           </a:xfrm>
@@ -6159,41 +5932,6 @@
         </p:nvSpPr>
         <p:spPr>
           <a:xfrm>
-            <a:off x="2194560" y="6446520"/>
-            <a:ext cx="5943600" cy="274320"/>
-          </a:xfrm>
-          <a:prstGeom prst="rect">
-            <a:avLst/>
-          </a:prstGeom>
-          <a:noFill/>
-        </p:spPr>
-        <p:txBody>
-          <a:bodyPr wrap="square" anchor="t" lIns="0" rIns="0" tIns="0" bIns="0">
-            <a:spAutoFit/>
-          </a:bodyPr>
-          <a:lstStyle/>
-          <a:p>
-            <a:pPr algn="l"/>
-            <a:r>
-              <a:rPr sz="1000" b="1" i="0">
-                <a:solidFill>
-                  <a:srgbClr val="8F989D"/>
-                </a:solidFill>
-                <a:latin typeface="Calibri"/>
-              </a:rPr>
-              <a:t>Inicio 5:10 pm</a:t>
-            </a:r>
-          </a:p>
-        </p:txBody>
-      </p:sp>
-      <p:sp>
-        <p:nvSpPr>
-          <p:cNvPr id="6" name="TextBox 5"/>
-          <p:cNvSpPr txBox="1"/>
-          <p:nvPr/>
-        </p:nvSpPr>
-        <p:spPr>
-          <a:xfrm>
             <a:off x="11094415" y="6446520"/>
             <a:ext cx="548640" cy="274320"/>
           </a:xfrm>
@@ -7299,41 +7037,6 @@
         </p:nvSpPr>
         <p:spPr>
           <a:xfrm>
-            <a:off x="2194560" y="6446520"/>
-            <a:ext cx="5943600" cy="274320"/>
-          </a:xfrm>
-          <a:prstGeom prst="rect">
-            <a:avLst/>
-          </a:prstGeom>
-          <a:noFill/>
-        </p:spPr>
-        <p:txBody>
-          <a:bodyPr wrap="square" anchor="t" lIns="0" rIns="0" tIns="0" bIns="0">
-            <a:spAutoFit/>
-          </a:bodyPr>
-          <a:lstStyle/>
-          <a:p>
-            <a:pPr algn="l"/>
-            <a:r>
-              <a:rPr sz="1000" b="1" i="0">
-                <a:solidFill>
-                  <a:srgbClr val="8F989D"/>
-                </a:solidFill>
-                <a:latin typeface="Calibri"/>
-              </a:rPr>
-              <a:t>Inicio 5:10 pm</a:t>
-            </a:r>
-          </a:p>
-        </p:txBody>
-      </p:sp>
-      <p:sp>
-        <p:nvSpPr>
-          <p:cNvPr id="26" name="TextBox 25"/>
-          <p:cNvSpPr txBox="1"/>
-          <p:nvPr/>
-        </p:nvSpPr>
-        <p:spPr>
-          <a:xfrm>
             <a:off x="11094415" y="6446520"/>
             <a:ext cx="548640" cy="274320"/>
           </a:xfrm>
@@ -7685,41 +7388,6 @@
         </p:nvSpPr>
         <p:spPr>
           <a:xfrm>
-            <a:off x="2194560" y="6446520"/>
-            <a:ext cx="5943600" cy="274320"/>
-          </a:xfrm>
-          <a:prstGeom prst="rect">
-            <a:avLst/>
-          </a:prstGeom>
-          <a:noFill/>
-        </p:spPr>
-        <p:txBody>
-          <a:bodyPr wrap="square" anchor="t" lIns="0" rIns="0" tIns="0" bIns="0">
-            <a:spAutoFit/>
-          </a:bodyPr>
-          <a:lstStyle/>
-          <a:p>
-            <a:pPr algn="l"/>
-            <a:r>
-              <a:rPr sz="1000" b="1" i="0">
-                <a:solidFill>
-                  <a:srgbClr val="8F989D"/>
-                </a:solidFill>
-                <a:latin typeface="Calibri"/>
-              </a:rPr>
-              <a:t>Inicio 5:10 pm</a:t>
-            </a:r>
-          </a:p>
-        </p:txBody>
-      </p:sp>
-      <p:sp>
-        <p:nvSpPr>
-          <p:cNvPr id="6" name="TextBox 5"/>
-          <p:cNvSpPr txBox="1"/>
-          <p:nvPr/>
-        </p:nvSpPr>
-        <p:spPr>
-          <a:xfrm>
             <a:off x="11094415" y="6446520"/>
             <a:ext cx="548640" cy="274320"/>
           </a:xfrm>
@@ -8173,41 +7841,6 @@
       <p:sp>
         <p:nvSpPr>
           <p:cNvPr id="10" name="TextBox 9"/>
-          <p:cNvSpPr txBox="1"/>
-          <p:nvPr/>
-        </p:nvSpPr>
-        <p:spPr>
-          <a:xfrm>
-            <a:off x="2194560" y="6446520"/>
-            <a:ext cx="5943600" cy="274320"/>
-          </a:xfrm>
-          <a:prstGeom prst="rect">
-            <a:avLst/>
-          </a:prstGeom>
-          <a:noFill/>
-        </p:spPr>
-        <p:txBody>
-          <a:bodyPr wrap="square" anchor="t" lIns="0" rIns="0" tIns="0" bIns="0">
-            <a:spAutoFit/>
-          </a:bodyPr>
-          <a:lstStyle/>
-          <a:p>
-            <a:pPr algn="l"/>
-            <a:r>
-              <a:rPr sz="1000" b="1" i="0">
-                <a:solidFill>
-                  <a:srgbClr val="8F989D"/>
-                </a:solidFill>
-                <a:latin typeface="Calibri"/>
-              </a:rPr>
-              <a:t>Inicio 5:10 pm</a:t>
-            </a:r>
-          </a:p>
-        </p:txBody>
-      </p:sp>
-      <p:sp>
-        <p:nvSpPr>
-          <p:cNvPr id="11" name="TextBox 10"/>
           <p:cNvSpPr txBox="1"/>
           <p:nvPr/>
         </p:nvSpPr>

--- a/Pregrado/Investigacion en ciencia y tecnologia/Clases/Presentacion del Curso - Investigacion Ciencia y Tecnologia.pptx
+++ b/Pregrado/Investigacion en ciencia y tecnologia/Clases/Presentacion del Curso - Investigacion Ciencia y Tecnologia.pptx
@@ -6313,7 +6313,7 @@
                 </a:solidFill>
                 <a:latin typeface="Calibri"/>
               </a:rPr>
-              <a:t>10/08/2026</a:t>
+              <a:t>13/08/2026</a:t>
             </a:r>
           </a:p>
         </p:txBody>
@@ -6408,7 +6408,7 @@
                 </a:solidFill>
                 <a:latin typeface="Calibri"/>
               </a:rPr>
-              <a:t>20/08/2026</a:t>
+              <a:t>27/08/2026</a:t>
             </a:r>
           </a:p>
         </p:txBody>
@@ -6582,7 +6582,7 @@
                 </a:solidFill>
                 <a:latin typeface="Calibri"/>
               </a:rPr>
-              <a:t>21/08/2026</a:t>
+              <a:t>28/08/2026</a:t>
             </a:r>
           </a:p>
         </p:txBody>
@@ -6677,7 +6677,7 @@
                 </a:solidFill>
                 <a:latin typeface="Calibri"/>
               </a:rPr>
-              <a:t>27/08/2026</a:t>
+              <a:t>03/09/2026</a:t>
             </a:r>
           </a:p>
         </p:txBody>
@@ -6851,7 +6851,7 @@
                 </a:solidFill>
                 <a:latin typeface="Calibri"/>
               </a:rPr>
-              <a:t>03/09/2026</a:t>
+              <a:t>04/09/2026</a:t>
             </a:r>
           </a:p>
         </p:txBody>
@@ -7024,7 +7024,7 @@
                 </a:solidFill>
                 <a:latin typeface="Calibri"/>
               </a:rPr>
-              <a:t>Corte 1 = 30% · Corte 2 = 30% · Corte 3 = 40%. Enunciados: Clases/Recursos/ACAs/. Fechas = día de clase (jue). Confirma desglose EV en CDigital.</a:t>
+              <a:t>Corte 1 = 30% · Corte 2 = 30% · Corte 3 = 40%. Cada ACA evalúa el corte completo (no hay subdivisión en varios EV). Enunciados: Recursos/ACAs/.</a:t>
             </a:r>
           </a:p>
         </p:txBody>
@@ -7239,7 +7239,25 @@
                 </a:solidFill>
                 <a:latin typeface="Calibri"/>
               </a:rPr>
-              <a:t> (desglose EV: confirmar en CDigital / syllabus SIAC EI005).</a:t>
+              <a:t> Cada ACA evalúa el </a:t>
+            </a:r>
+            <a:r>
+              <a:rPr sz="1300" b="1" i="0">
+                <a:solidFill>
+                  <a:srgbClr val="2B2B2B"/>
+                </a:solidFill>
+                <a:latin typeface="Calibri"/>
+              </a:rPr>
+              <a:t>100% de su corte</a:t>
+            </a:r>
+            <a:r>
+              <a:rPr sz="1300" b="0" i="0">
+                <a:solidFill>
+                  <a:srgbClr val="2B2B2B"/>
+                </a:solidFill>
+                <a:latin typeface="Calibri"/>
+              </a:rPr>
+              <a:t>: ACA 1 = Corte 1, ACA 2 = Corte 2, ACA 3 = Corte 3.</a:t>
             </a:r>
           </a:p>
           <a:p>

--- a/Pregrado/Investigacion en ciencia y tecnologia/Clases/Presentacion del Curso - Investigacion Ciencia y Tecnologia.pptx
+++ b/Pregrado/Investigacion en ciencia y tecnologia/Clases/Presentacion del Curso - Investigacion Ciencia y Tecnologia.pptx
@@ -7024,7 +7024,7 @@
                 </a:solidFill>
                 <a:latin typeface="Calibri"/>
               </a:rPr>
-              <a:t>Corte 1 = 30% · Corte 2 = 30% · Corte 3 = 40%. Cada ACA evalúa el corte completo (no hay subdivisión en varios EV). Enunciados: Recursos/ACAs/.</a:t>
+              <a:t>Corte 1 = 30% · Corte 2 = 30% · Corte 3 = 40%. Cada ACA evalúa el corte completo (no hay subdivisión en varios EV). Enunciados: Clases/Recursos/ACAs/. Fechas fijadas por el Docente, siempre en el día de clase (jue).</a:t>
             </a:r>
           </a:p>
         </p:txBody>
@@ -7239,7 +7239,7 @@
                 </a:solidFill>
                 <a:latin typeface="Calibri"/>
               </a:rPr>
-              <a:t> Cada ACA evalúa el </a:t>
+              <a:t> · Cada ACA evalúa el </a:t>
             </a:r>
             <a:r>
               <a:rPr sz="1300" b="1" i="0">

--- a/Pregrado/Investigacion en ciencia y tecnologia/Clases/Presentacion del Curso - Investigacion Ciencia y Tecnologia.pptx
+++ b/Pregrado/Investigacion en ciencia y tecnologia/Clases/Presentacion del Curso - Investigacion Ciencia y Tecnologia.pptx
@@ -3757,7 +3757,7 @@
                 </a:solidFill>
                 <a:latin typeface="Calibri"/>
               </a:rPr>
-              <a:t>[URL CDigital — campus del curso pendiente]</a:t>
+              <a:t>https://cdigital.cun.edu.co/course/view.php?id=111070</a:t>
             </a:r>
           </a:p>
           <a:p>

--- a/Pregrado/Investigacion en ciencia y tecnologia/Clases/Presentacion del Curso - Investigacion Ciencia y Tecnologia.pptx
+++ b/Pregrado/Investigacion en ciencia y tecnologia/Clases/Presentacion del Curso - Investigacion Ciencia y Tecnologia.pptx
@@ -16,6 +16,7 @@
     <p:sldId id="264" r:id="rId15"/>
     <p:sldId id="265" r:id="rId16"/>
     <p:sldId id="266" r:id="rId17"/>
+    <p:sldId id="267" r:id="rId18"/>
   </p:sldIdLst>
   <p:sldSz cx="12191695" cy="6858000" type="screen4x3"/>
   <p:notesSz cx="6858000" cy="9144000"/>
@@ -3657,21 +3658,65 @@
                 </a:solidFill>
                 <a:latin typeface="Calibri"/>
               </a:rPr>
-              <a:t>RECURSOS</a:t>
-            </a:r>
-          </a:p>
-        </p:txBody>
-      </p:sp>
-      <p:sp>
-        <p:nvSpPr>
-          <p:cNvPr id="4" name="TextBox 3"/>
+              <a:t>ACUERDOS DEL CURSO</a:t>
+            </a:r>
+          </a:p>
+        </p:txBody>
+      </p:sp>
+      <p:sp>
+        <p:nvSpPr>
+          <p:cNvPr id="4" name="Rounded Rectangle 3"/>
+          <p:cNvSpPr/>
+          <p:nvPr/>
+        </p:nvSpPr>
+        <p:spPr>
+          <a:xfrm>
+            <a:off x="640080" y="1737360"/>
+            <a:ext cx="10911535" cy="969264"/>
+          </a:xfrm>
+          <a:prstGeom prst="roundRect">
+            <a:avLst/>
+          </a:prstGeom>
+          <a:solidFill>
+            <a:srgbClr val="E8F5EC"/>
+          </a:solidFill>
+          <a:ln>
+            <a:noFill/>
+          </a:ln>
+          <a:effectLst/>
+        </p:spPr>
+        <p:style>
+          <a:lnRef idx="1">
+            <a:schemeClr val="accent1"/>
+          </a:lnRef>
+          <a:fillRef idx="3">
+            <a:schemeClr val="accent1"/>
+          </a:fillRef>
+          <a:effectRef idx="2">
+            <a:schemeClr val="accent1"/>
+          </a:effectRef>
+          <a:fontRef idx="minor">
+            <a:schemeClr val="lt1"/>
+          </a:fontRef>
+        </p:style>
+        <p:txBody>
+          <a:bodyPr rtlCol="0" anchor="ctr"/>
+          <a:lstStyle/>
+          <a:p>
+            <a:pPr algn="ctr"/>
+          </a:p>
+        </p:txBody>
+      </p:sp>
+      <p:sp>
+        <p:nvSpPr>
+          <p:cNvPr id="5" name="TextBox 4"/>
           <p:cNvSpPr txBox="1"/>
           <p:nvPr/>
         </p:nvSpPr>
         <p:spPr>
           <a:xfrm>
-            <a:off x="640080" y="1691639"/>
-            <a:ext cx="10911535" cy="4617720"/>
+            <a:off x="868680" y="1847088"/>
+            <a:ext cx="10454335" cy="749808"/>
           </a:xfrm>
           <a:prstGeom prst="rect">
             <a:avLst/>
@@ -3684,300 +3729,261 @@
           </a:bodyPr>
           <a:lstStyle/>
           <a:p>
+            <a:r>
+              <a:rPr sz="1300" b="1" i="0">
+                <a:solidFill>
+                  <a:srgbClr val="0C2340"/>
+                </a:solidFill>
+                <a:latin typeface="Calibri"/>
+              </a:rPr>
+              <a:t>ℹ️ Nota institucional</a:t>
+            </a:r>
+          </a:p>
+          <a:p>
             <a:pPr>
-              <a:spcAft>
-                <a:spcPts val="1000"/>
-              </a:spcAft>
+              <a:spcBef>
+                <a:spcPts val="400"/>
+              </a:spcBef>
             </a:pPr>
             <a:r>
-              <a:rPr sz="1600" b="0" i="0">
-                <a:solidFill>
-                  <a:srgbClr val="2B2B2B"/>
-                </a:solidFill>
-                <a:latin typeface="Calibri"/>
-              </a:rPr>
-              <a:t>–   </a:t>
-            </a:r>
-            <a:r>
-              <a:rPr sz="1600" b="1" i="0">
-                <a:solidFill>
-                  <a:srgbClr val="2B2B2B"/>
-                </a:solidFill>
-                <a:latin typeface="Calibri"/>
-              </a:rPr>
-              <a:t>Contacto del Docente:</a:t>
-            </a:r>
-            <a:r>
-              <a:rPr sz="1600" b="0" i="0">
-                <a:solidFill>
-                  <a:srgbClr val="2B2B2B"/>
-                </a:solidFill>
-                <a:latin typeface="Calibri"/>
-              </a:rPr>
-              <a:t> julian_castanoe@cun.edu.co</a:t>
+              <a:rPr sz="1300" b="0" i="0">
+                <a:solidFill>
+                  <a:srgbClr val="2B2B2B"/>
+                </a:solidFill>
+                <a:latin typeface="Calibri"/>
+              </a:rPr>
+              <a:t>Encuentro sincrónico: </a:t>
+            </a:r>
+            <a:r>
+              <a:rPr sz="1300" b="1" i="0">
+                <a:solidFill>
+                  <a:srgbClr val="2B2B2B"/>
+                </a:solidFill>
+                <a:latin typeface="Calibri"/>
+              </a:rPr>
+              <a:t>Jueves, 5:00 pm – 6:00 pm</a:t>
+            </a:r>
+            <a:r>
+              <a:rPr sz="1300" b="0" i="0">
+                <a:solidFill>
+                  <a:srgbClr val="2B2B2B"/>
+                </a:solidFill>
+                <a:latin typeface="Calibri"/>
+              </a:rPr>
+              <a:t> por Google Meet. El enlace se publica en el aula virtual.</a:t>
+            </a:r>
+          </a:p>
+        </p:txBody>
+      </p:sp>
+      <p:sp>
+        <p:nvSpPr>
+          <p:cNvPr id="6" name="Rounded Rectangle 5"/>
+          <p:cNvSpPr/>
+          <p:nvPr/>
+        </p:nvSpPr>
+        <p:spPr>
+          <a:xfrm>
+            <a:off x="640080" y="2935224"/>
+            <a:ext cx="10911535" cy="969264"/>
+          </a:xfrm>
+          <a:prstGeom prst="roundRect">
+            <a:avLst/>
+          </a:prstGeom>
+          <a:solidFill>
+            <a:srgbClr val="FDECD8"/>
+          </a:solidFill>
+          <a:ln>
+            <a:noFill/>
+          </a:ln>
+          <a:effectLst/>
+        </p:spPr>
+        <p:style>
+          <a:lnRef idx="1">
+            <a:schemeClr val="accent1"/>
+          </a:lnRef>
+          <a:fillRef idx="3">
+            <a:schemeClr val="accent1"/>
+          </a:fillRef>
+          <a:effectRef idx="2">
+            <a:schemeClr val="accent1"/>
+          </a:effectRef>
+          <a:fontRef idx="minor">
+            <a:schemeClr val="lt1"/>
+          </a:fontRef>
+        </p:style>
+        <p:txBody>
+          <a:bodyPr rtlCol="0" anchor="ctr"/>
+          <a:lstStyle/>
+          <a:p>
+            <a:pPr algn="ctr"/>
+          </a:p>
+        </p:txBody>
+      </p:sp>
+      <p:sp>
+        <p:nvSpPr>
+          <p:cNvPr id="7" name="TextBox 6"/>
+          <p:cNvSpPr txBox="1"/>
+          <p:nvPr/>
+        </p:nvSpPr>
+        <p:spPr>
+          <a:xfrm>
+            <a:off x="868680" y="3044952"/>
+            <a:ext cx="10454335" cy="749808"/>
+          </a:xfrm>
+          <a:prstGeom prst="rect">
+            <a:avLst/>
+          </a:prstGeom>
+          <a:noFill/>
+        </p:spPr>
+        <p:txBody>
+          <a:bodyPr wrap="square" anchor="t" lIns="0" rIns="0" tIns="0" bIns="0">
+            <a:spAutoFit/>
+          </a:bodyPr>
+          <a:lstStyle/>
+          <a:p>
+            <a:r>
+              <a:rPr sz="1300" b="1" i="0">
+                <a:solidFill>
+                  <a:srgbClr val="0C2340"/>
+                </a:solidFill>
+                <a:latin typeface="Calibri"/>
+              </a:rPr>
+              <a:t>💡 Aclaración</a:t>
             </a:r>
           </a:p>
           <a:p>
             <a:pPr>
-              <a:spcAft>
-                <a:spcPts val="1000"/>
-              </a:spcAft>
+              <a:spcBef>
+                <a:spcPts val="400"/>
+              </a:spcBef>
             </a:pPr>
             <a:r>
-              <a:rPr sz="1600" b="0" i="0">
-                <a:solidFill>
-                  <a:srgbClr val="2B2B2B"/>
-                </a:solidFill>
-                <a:latin typeface="Calibri"/>
-              </a:rPr>
-              <a:t>–   </a:t>
-            </a:r>
-            <a:r>
-              <a:rPr sz="1600" b="1" i="0">
-                <a:solidFill>
-                  <a:srgbClr val="2B2B2B"/>
-                </a:solidFill>
-                <a:latin typeface="Calibri"/>
-              </a:rPr>
-              <a:t>CDigital (campus del curso):</a:t>
-            </a:r>
-            <a:r>
-              <a:rPr sz="1600" b="0" i="0">
-                <a:solidFill>
-                  <a:srgbClr val="2B2B2B"/>
-                </a:solidFill>
-                <a:latin typeface="Calibri"/>
-              </a:rPr>
-              <a:t> </a:t>
-            </a:r>
-            <a:r>
-              <a:rPr sz="1600" b="1" i="0">
-                <a:solidFill>
-                  <a:srgbClr val="2B2B2B"/>
-                </a:solidFill>
-                <a:latin typeface="Calibri"/>
-              </a:rPr>
-              <a:t>https://cdigital.cun.edu.co/course/view.php?id=111070</a:t>
+              <a:rPr sz="1300" b="0" i="0">
+                <a:solidFill>
+                  <a:srgbClr val="2B2B2B"/>
+                </a:solidFill>
+                <a:latin typeface="Calibri"/>
+              </a:rPr>
+              <a:t>Si el día de clase es festivo colombiano, la sesión NO se cancela: se cursa como </a:t>
+            </a:r>
+            <a:r>
+              <a:rPr sz="1300" b="1" i="0">
+                <a:solidFill>
+                  <a:srgbClr val="2B2B2B"/>
+                </a:solidFill>
+                <a:latin typeface="Calibri"/>
+              </a:rPr>
+              <a:t>clase autónoma</a:t>
+            </a:r>
+            <a:r>
+              <a:rPr sz="1300" b="0" i="0">
+                <a:solidFill>
+                  <a:srgbClr val="2B2B2B"/>
+                </a:solidFill>
+                <a:latin typeface="Calibri"/>
+              </a:rPr>
+              <a:t> (material/actividad en el CDigital).</a:t>
+            </a:r>
+          </a:p>
+        </p:txBody>
+      </p:sp>
+      <p:sp>
+        <p:nvSpPr>
+          <p:cNvPr id="8" name="Rounded Rectangle 7"/>
+          <p:cNvSpPr/>
+          <p:nvPr/>
+        </p:nvSpPr>
+        <p:spPr>
+          <a:xfrm>
+            <a:off x="640080" y="4133087"/>
+            <a:ext cx="10911535" cy="713232"/>
+          </a:xfrm>
+          <a:prstGeom prst="roundRect">
+            <a:avLst/>
+          </a:prstGeom>
+          <a:solidFill>
+            <a:srgbClr val="FBE4E4"/>
+          </a:solidFill>
+          <a:ln>
+            <a:noFill/>
+          </a:ln>
+          <a:effectLst/>
+        </p:spPr>
+        <p:style>
+          <a:lnRef idx="1">
+            <a:schemeClr val="accent1"/>
+          </a:lnRef>
+          <a:fillRef idx="3">
+            <a:schemeClr val="accent1"/>
+          </a:fillRef>
+          <a:effectRef idx="2">
+            <a:schemeClr val="accent1"/>
+          </a:effectRef>
+          <a:fontRef idx="minor">
+            <a:schemeClr val="lt1"/>
+          </a:fontRef>
+        </p:style>
+        <p:txBody>
+          <a:bodyPr rtlCol="0" anchor="ctr"/>
+          <a:lstStyle/>
+          <a:p>
+            <a:pPr algn="ctr"/>
+          </a:p>
+        </p:txBody>
+      </p:sp>
+      <p:sp>
+        <p:nvSpPr>
+          <p:cNvPr id="9" name="TextBox 8"/>
+          <p:cNvSpPr txBox="1"/>
+          <p:nvPr/>
+        </p:nvSpPr>
+        <p:spPr>
+          <a:xfrm>
+            <a:off x="868680" y="4242816"/>
+            <a:ext cx="10454335" cy="493776"/>
+          </a:xfrm>
+          <a:prstGeom prst="rect">
+            <a:avLst/>
+          </a:prstGeom>
+          <a:noFill/>
+        </p:spPr>
+        <p:txBody>
+          <a:bodyPr wrap="square" anchor="t" lIns="0" rIns="0" tIns="0" bIns="0">
+            <a:spAutoFit/>
+          </a:bodyPr>
+          <a:lstStyle/>
+          <a:p>
+            <a:r>
+              <a:rPr sz="1300" b="1" i="0">
+                <a:solidFill>
+                  <a:srgbClr val="0C2340"/>
+                </a:solidFill>
+                <a:latin typeface="Calibri"/>
+              </a:rPr>
+              <a:t>⚠️ Importante</a:t>
             </a:r>
           </a:p>
           <a:p>
             <a:pPr>
-              <a:spcAft>
-                <a:spcPts val="1000"/>
-              </a:spcAft>
+              <a:spcBef>
+                <a:spcPts val="400"/>
+              </a:spcBef>
             </a:pPr>
             <a:r>
-              <a:rPr sz="1600" b="0" i="0">
-                <a:solidFill>
-                  <a:srgbClr val="2B2B2B"/>
-                </a:solidFill>
-                <a:latin typeface="Calibri"/>
-              </a:rPr>
-              <a:t>–   </a:t>
-            </a:r>
-            <a:r>
-              <a:rPr sz="1600" b="1" i="0">
-                <a:solidFill>
-                  <a:srgbClr val="2B2B2B"/>
-                </a:solidFill>
-                <a:latin typeface="Calibri"/>
-              </a:rPr>
-              <a:t>Google Meet (mismo enlace toda la serie):</a:t>
-            </a:r>
-            <a:r>
-              <a:rPr sz="1600" b="0" i="0">
-                <a:solidFill>
-                  <a:srgbClr val="2B2B2B"/>
-                </a:solidFill>
-                <a:latin typeface="Calibri"/>
-              </a:rPr>
-              <a:t> </a:t>
-            </a:r>
-            <a:r>
-              <a:rPr sz="1600" b="1" i="0">
-                <a:solidFill>
-                  <a:srgbClr val="2B2B2B"/>
-                </a:solidFill>
-                <a:latin typeface="Calibri"/>
-              </a:rPr>
-              <a:t>[URL Meet — mismo enlace toda la serie · Investigación C&amp;T]</a:t>
-            </a:r>
-          </a:p>
-          <a:p>
-            <a:pPr>
-              <a:spcAft>
-                <a:spcPts val="1000"/>
-              </a:spcAft>
-            </a:pPr>
-            <a:r>
-              <a:rPr sz="1600" b="0" i="0">
-                <a:solidFill>
-                  <a:srgbClr val="2B2B2B"/>
-                </a:solidFill>
-                <a:latin typeface="Calibri"/>
-              </a:rPr>
-              <a:t>–   </a:t>
-            </a:r>
-            <a:r>
-              <a:rPr sz="1600" b="1" i="0">
-                <a:solidFill>
-                  <a:srgbClr val="2B2B2B"/>
-                </a:solidFill>
-                <a:latin typeface="Calibri"/>
-              </a:rPr>
-              <a:t>Plantilla APA CUN – Proyecto de Grado</a:t>
-            </a:r>
-            <a:r>
-              <a:rPr sz="1600" b="0" i="0">
-                <a:solidFill>
-                  <a:srgbClr val="2B2B2B"/>
-                </a:solidFill>
-                <a:latin typeface="Calibri"/>
-              </a:rPr>
-              <a:t> (viene en tu carpeta del curso): `Recursos/Plantilla_APA_CUN_Proyecto de grado.docx`.</a:t>
-            </a:r>
-          </a:p>
-          <a:p>
-            <a:pPr>
-              <a:spcAft>
-                <a:spcPts val="1000"/>
-              </a:spcAft>
-            </a:pPr>
-            <a:r>
-              <a:rPr sz="1600" b="0" i="0">
-                <a:solidFill>
-                  <a:srgbClr val="2B2B2B"/>
-                </a:solidFill>
-                <a:latin typeface="Calibri"/>
-              </a:rPr>
-              <a:t>–   </a:t>
-            </a:r>
-            <a:r>
-              <a:rPr sz="1600" b="1" i="0">
-                <a:solidFill>
-                  <a:srgbClr val="2B2B2B"/>
-                </a:solidFill>
-                <a:latin typeface="Calibri"/>
-              </a:rPr>
-              <a:t>Plantilla APA CUN (en tu carpeta):</a:t>
-            </a:r>
-            <a:r>
-              <a:rPr sz="1600" b="0" i="0">
-                <a:solidFill>
-                  <a:srgbClr val="2B2B2B"/>
-                </a:solidFill>
-                <a:latin typeface="Calibri"/>
-              </a:rPr>
-              <a:t> `Recursos/Plantilla_APA_CUN_Proyecto de grado.docx`</a:t>
-            </a:r>
-          </a:p>
-          <a:p>
-            <a:pPr>
-              <a:spcAft>
-                <a:spcPts val="1000"/>
-              </a:spcAft>
-            </a:pPr>
-            <a:r>
-              <a:rPr sz="1600" b="0" i="0">
-                <a:solidFill>
-                  <a:srgbClr val="2B2B2B"/>
-                </a:solidFill>
-                <a:latin typeface="Calibri"/>
-              </a:rPr>
-              <a:t>–   </a:t>
-            </a:r>
-            <a:r>
-              <a:rPr sz="1600" b="1" i="0">
-                <a:solidFill>
-                  <a:srgbClr val="2B2B2B"/>
-                </a:solidFill>
-                <a:latin typeface="Calibri"/>
-              </a:rPr>
-              <a:t>Enunciados ACA / cortes (estudiantes):</a:t>
-            </a:r>
-            <a:r>
-              <a:rPr sz="1600" b="0" i="0">
-                <a:solidFill>
-                  <a:srgbClr val="2B2B2B"/>
-                </a:solidFill>
-                <a:latin typeface="Calibri"/>
-              </a:rPr>
-              <a:t> `Clases/Recursos/ACAs/`.</a:t>
-            </a:r>
-          </a:p>
-          <a:p>
-            <a:pPr>
-              <a:spcAft>
-                <a:spcPts val="1000"/>
-              </a:spcAft>
-            </a:pPr>
-            <a:r>
-              <a:rPr sz="1600" b="0" i="0">
-                <a:solidFill>
-                  <a:srgbClr val="2B2B2B"/>
-                </a:solidFill>
-                <a:latin typeface="Calibri"/>
-              </a:rPr>
-              <a:t>–   </a:t>
-            </a:r>
-            <a:r>
-              <a:rPr sz="1600" b="1" i="0">
-                <a:solidFill>
-                  <a:srgbClr val="2B2B2B"/>
-                </a:solidFill>
-                <a:latin typeface="Calibri"/>
-              </a:rPr>
-              <a:t>Bases de datos:</a:t>
-            </a:r>
-            <a:r>
-              <a:rPr sz="1600" b="0" i="0">
-                <a:solidFill>
-                  <a:srgbClr val="2B2B2B"/>
-                </a:solidFill>
-                <a:latin typeface="Calibri"/>
-              </a:rPr>
-              <a:t> biblioteca CUN (EBSCO, SciELO, Redalyc, Latindex) + citas en la nube (ZoteroBib / Google Docs).</a:t>
-            </a:r>
-          </a:p>
-          <a:p>
-            <a:pPr>
-              <a:spcAft>
-                <a:spcPts val="1000"/>
-              </a:spcAft>
-            </a:pPr>
-            <a:r>
-              <a:rPr sz="1600" b="0" i="0">
-                <a:solidFill>
-                  <a:srgbClr val="2B2B2B"/>
-                </a:solidFill>
-                <a:latin typeface="Calibri"/>
-              </a:rPr>
-              <a:t>–   </a:t>
-            </a:r>
-            <a:r>
-              <a:rPr sz="1600" b="1" i="0">
-                <a:solidFill>
-                  <a:srgbClr val="2B2B2B"/>
-                </a:solidFill>
-                <a:latin typeface="Calibri"/>
-              </a:rPr>
-              <a:t>Entregas y notas oficiales:</a:t>
-            </a:r>
-            <a:r>
-              <a:rPr sz="1600" b="0" i="0">
-                <a:solidFill>
-                  <a:srgbClr val="2B2B2B"/>
-                </a:solidFill>
-                <a:latin typeface="Calibri"/>
-              </a:rPr>
-              <a:t> solo por CDigital del curso.</a:t>
-            </a:r>
-          </a:p>
-        </p:txBody>
-      </p:sp>
-      <p:sp>
-        <p:nvSpPr>
-          <p:cNvPr id="5" name="TextBox 4"/>
+              <a:rPr sz="1300" b="0" i="0">
+                <a:solidFill>
+                  <a:srgbClr val="2B2B2B"/>
+                </a:solidFill>
+                <a:latin typeface="Calibri"/>
+              </a:rPr>
+              <a:t>El producto final se construye desde la semana 1 — no es una entrega sorpresa al cierre.</a:t>
+            </a:r>
+          </a:p>
+        </p:txBody>
+      </p:sp>
+      <p:sp>
+        <p:nvSpPr>
+          <p:cNvPr id="10" name="TextBox 9"/>
           <p:cNvSpPr txBox="1"/>
           <p:nvPr/>
         </p:nvSpPr>
@@ -4045,6 +4051,459 @@
         <p:spPr>
           <a:xfrm>
             <a:off x="0" y="0"/>
+            <a:ext cx="12191695" cy="1188720"/>
+          </a:xfrm>
+          <a:prstGeom prst="rect">
+            <a:avLst/>
+          </a:prstGeom>
+          <a:solidFill>
+            <a:srgbClr val="0C2340"/>
+          </a:solidFill>
+          <a:ln>
+            <a:noFill/>
+          </a:ln>
+          <a:effectLst/>
+        </p:spPr>
+        <p:style>
+          <a:lnRef idx="1">
+            <a:schemeClr val="accent1"/>
+          </a:lnRef>
+          <a:fillRef idx="3">
+            <a:schemeClr val="accent1"/>
+          </a:fillRef>
+          <a:effectRef idx="2">
+            <a:schemeClr val="accent1"/>
+          </a:effectRef>
+          <a:fontRef idx="minor">
+            <a:schemeClr val="lt1"/>
+          </a:fontRef>
+        </p:style>
+        <p:txBody>
+          <a:bodyPr rtlCol="0" anchor="ctr"/>
+          <a:lstStyle/>
+          <a:p>
+            <a:pPr algn="ctr"/>
+          </a:p>
+        </p:txBody>
+      </p:sp>
+      <p:sp>
+        <p:nvSpPr>
+          <p:cNvPr id="3" name="TextBox 2"/>
+          <p:cNvSpPr txBox="1"/>
+          <p:nvPr/>
+        </p:nvSpPr>
+        <p:spPr>
+          <a:xfrm>
+            <a:off x="640080" y="0"/>
+            <a:ext cx="9082735" cy="1188720"/>
+          </a:xfrm>
+          <a:prstGeom prst="rect">
+            <a:avLst/>
+          </a:prstGeom>
+          <a:noFill/>
+        </p:spPr>
+        <p:txBody>
+          <a:bodyPr wrap="square" anchor="ctr" lIns="0" rIns="0" tIns="0" bIns="0">
+            <a:spAutoFit/>
+          </a:bodyPr>
+          <a:lstStyle/>
+          <a:p>
+            <a:pPr algn="ctr"/>
+            <a:r>
+              <a:rPr sz="2600" b="1" i="0">
+                <a:solidFill>
+                  <a:srgbClr val="FFFFFF"/>
+                </a:solidFill>
+                <a:latin typeface="Calibri"/>
+              </a:rPr>
+              <a:t>RECURSOS</a:t>
+            </a:r>
+          </a:p>
+        </p:txBody>
+      </p:sp>
+      <p:sp>
+        <p:nvSpPr>
+          <p:cNvPr id="4" name="TextBox 3"/>
+          <p:cNvSpPr txBox="1"/>
+          <p:nvPr/>
+        </p:nvSpPr>
+        <p:spPr>
+          <a:xfrm>
+            <a:off x="640080" y="1691639"/>
+            <a:ext cx="10911535" cy="4617720"/>
+          </a:xfrm>
+          <a:prstGeom prst="rect">
+            <a:avLst/>
+          </a:prstGeom>
+          <a:noFill/>
+        </p:spPr>
+        <p:txBody>
+          <a:bodyPr wrap="square" anchor="t" lIns="0" rIns="0" tIns="0" bIns="0">
+            <a:spAutoFit/>
+          </a:bodyPr>
+          <a:lstStyle/>
+          <a:p>
+            <a:pPr>
+              <a:spcAft>
+                <a:spcPts val="1000"/>
+              </a:spcAft>
+            </a:pPr>
+            <a:r>
+              <a:rPr sz="1600" b="0" i="0">
+                <a:solidFill>
+                  <a:srgbClr val="2B2B2B"/>
+                </a:solidFill>
+                <a:latin typeface="Calibri"/>
+              </a:rPr>
+              <a:t>–   </a:t>
+            </a:r>
+            <a:r>
+              <a:rPr sz="1600" b="1" i="0">
+                <a:solidFill>
+                  <a:srgbClr val="2B2B2B"/>
+                </a:solidFill>
+                <a:latin typeface="Calibri"/>
+              </a:rPr>
+              <a:t>Contacto del Docente:</a:t>
+            </a:r>
+            <a:r>
+              <a:rPr sz="1600" b="0" i="0">
+                <a:solidFill>
+                  <a:srgbClr val="2B2B2B"/>
+                </a:solidFill>
+                <a:latin typeface="Calibri"/>
+              </a:rPr>
+              <a:t> julian_castanoe@cun.edu.co</a:t>
+            </a:r>
+          </a:p>
+          <a:p>
+            <a:pPr>
+              <a:spcAft>
+                <a:spcPts val="1000"/>
+              </a:spcAft>
+            </a:pPr>
+            <a:r>
+              <a:rPr sz="1600" b="0" i="0">
+                <a:solidFill>
+                  <a:srgbClr val="2B2B2B"/>
+                </a:solidFill>
+                <a:latin typeface="Calibri"/>
+              </a:rPr>
+              <a:t>–   </a:t>
+            </a:r>
+            <a:r>
+              <a:rPr sz="1600" b="1" i="0">
+                <a:solidFill>
+                  <a:srgbClr val="2B2B2B"/>
+                </a:solidFill>
+                <a:latin typeface="Calibri"/>
+              </a:rPr>
+              <a:t>CDigital (campus del curso):</a:t>
+            </a:r>
+            <a:r>
+              <a:rPr sz="1600" b="0" i="0">
+                <a:solidFill>
+                  <a:srgbClr val="2B2B2B"/>
+                </a:solidFill>
+                <a:latin typeface="Calibri"/>
+              </a:rPr>
+              <a:t> </a:t>
+            </a:r>
+            <a:r>
+              <a:rPr sz="1600" b="1" i="0">
+                <a:solidFill>
+                  <a:srgbClr val="2B2B2B"/>
+                </a:solidFill>
+                <a:latin typeface="Calibri"/>
+              </a:rPr>
+              <a:t>https://cdigital.cun.edu.co/course/view.php?id=111070</a:t>
+            </a:r>
+          </a:p>
+          <a:p>
+            <a:pPr>
+              <a:spcAft>
+                <a:spcPts val="1000"/>
+              </a:spcAft>
+            </a:pPr>
+            <a:r>
+              <a:rPr sz="1600" b="0" i="0">
+                <a:solidFill>
+                  <a:srgbClr val="2B2B2B"/>
+                </a:solidFill>
+                <a:latin typeface="Calibri"/>
+              </a:rPr>
+              <a:t>–   </a:t>
+            </a:r>
+            <a:r>
+              <a:rPr sz="1600" b="1" i="0">
+                <a:solidFill>
+                  <a:srgbClr val="2B2B2B"/>
+                </a:solidFill>
+                <a:latin typeface="Calibri"/>
+              </a:rPr>
+              <a:t>Google Meet (mismo enlace toda la serie):</a:t>
+            </a:r>
+            <a:r>
+              <a:rPr sz="1600" b="0" i="0">
+                <a:solidFill>
+                  <a:srgbClr val="2B2B2B"/>
+                </a:solidFill>
+                <a:latin typeface="Calibri"/>
+              </a:rPr>
+              <a:t> </a:t>
+            </a:r>
+            <a:r>
+              <a:rPr sz="1600" b="1" i="0">
+                <a:solidFill>
+                  <a:srgbClr val="2B2B2B"/>
+                </a:solidFill>
+                <a:latin typeface="Calibri"/>
+              </a:rPr>
+              <a:t>[URL Meet — mismo enlace toda la serie · Investigación C&amp;T]</a:t>
+            </a:r>
+          </a:p>
+          <a:p>
+            <a:pPr>
+              <a:spcAft>
+                <a:spcPts val="1000"/>
+              </a:spcAft>
+            </a:pPr>
+            <a:r>
+              <a:rPr sz="1600" b="0" i="0">
+                <a:solidFill>
+                  <a:srgbClr val="2B2B2B"/>
+                </a:solidFill>
+                <a:latin typeface="Calibri"/>
+              </a:rPr>
+              <a:t>–   </a:t>
+            </a:r>
+            <a:r>
+              <a:rPr sz="1600" b="1" i="0">
+                <a:solidFill>
+                  <a:srgbClr val="2B2B2B"/>
+                </a:solidFill>
+                <a:latin typeface="Calibri"/>
+              </a:rPr>
+              <a:t>Plantilla APA CUN – Proyecto de Grado</a:t>
+            </a:r>
+            <a:r>
+              <a:rPr sz="1600" b="0" i="0">
+                <a:solidFill>
+                  <a:srgbClr val="2B2B2B"/>
+                </a:solidFill>
+                <a:latin typeface="Calibri"/>
+              </a:rPr>
+              <a:t> (viene en tu carpeta del curso): `Recursos/Plantilla_APA_CUN_Proyecto de grado.docx`.</a:t>
+            </a:r>
+          </a:p>
+          <a:p>
+            <a:pPr>
+              <a:spcAft>
+                <a:spcPts val="1000"/>
+              </a:spcAft>
+            </a:pPr>
+            <a:r>
+              <a:rPr sz="1600" b="0" i="0">
+                <a:solidFill>
+                  <a:srgbClr val="2B2B2B"/>
+                </a:solidFill>
+                <a:latin typeface="Calibri"/>
+              </a:rPr>
+              <a:t>–   </a:t>
+            </a:r>
+            <a:r>
+              <a:rPr sz="1600" b="1" i="0">
+                <a:solidFill>
+                  <a:srgbClr val="2B2B2B"/>
+                </a:solidFill>
+                <a:latin typeface="Calibri"/>
+              </a:rPr>
+              <a:t>Plantilla APA CUN (en tu carpeta):</a:t>
+            </a:r>
+            <a:r>
+              <a:rPr sz="1600" b="0" i="0">
+                <a:solidFill>
+                  <a:srgbClr val="2B2B2B"/>
+                </a:solidFill>
+                <a:latin typeface="Calibri"/>
+              </a:rPr>
+              <a:t> `Recursos/Plantilla_APA_CUN_Proyecto de grado.docx`</a:t>
+            </a:r>
+          </a:p>
+          <a:p>
+            <a:pPr>
+              <a:spcAft>
+                <a:spcPts val="1000"/>
+              </a:spcAft>
+            </a:pPr>
+            <a:r>
+              <a:rPr sz="1600" b="0" i="0">
+                <a:solidFill>
+                  <a:srgbClr val="2B2B2B"/>
+                </a:solidFill>
+                <a:latin typeface="Calibri"/>
+              </a:rPr>
+              <a:t>–   </a:t>
+            </a:r>
+            <a:r>
+              <a:rPr sz="1600" b="1" i="0">
+                <a:solidFill>
+                  <a:srgbClr val="2B2B2B"/>
+                </a:solidFill>
+                <a:latin typeface="Calibri"/>
+              </a:rPr>
+              <a:t>Enunciados ACA / cortes (estudiantes):</a:t>
+            </a:r>
+            <a:r>
+              <a:rPr sz="1600" b="0" i="0">
+                <a:solidFill>
+                  <a:srgbClr val="2B2B2B"/>
+                </a:solidFill>
+                <a:latin typeface="Calibri"/>
+              </a:rPr>
+              <a:t> `Clases/Recursos/ACAs/`.</a:t>
+            </a:r>
+          </a:p>
+          <a:p>
+            <a:pPr>
+              <a:spcAft>
+                <a:spcPts val="1000"/>
+              </a:spcAft>
+            </a:pPr>
+            <a:r>
+              <a:rPr sz="1600" b="0" i="0">
+                <a:solidFill>
+                  <a:srgbClr val="2B2B2B"/>
+                </a:solidFill>
+                <a:latin typeface="Calibri"/>
+              </a:rPr>
+              <a:t>–   </a:t>
+            </a:r>
+            <a:r>
+              <a:rPr sz="1600" b="1" i="0">
+                <a:solidFill>
+                  <a:srgbClr val="2B2B2B"/>
+                </a:solidFill>
+                <a:latin typeface="Calibri"/>
+              </a:rPr>
+              <a:t>Bases de datos:</a:t>
+            </a:r>
+            <a:r>
+              <a:rPr sz="1600" b="0" i="0">
+                <a:solidFill>
+                  <a:srgbClr val="2B2B2B"/>
+                </a:solidFill>
+                <a:latin typeface="Calibri"/>
+              </a:rPr>
+              <a:t> biblioteca CUN (EBSCO, SciELO, Redalyc, Latindex) + citas en la nube (ZoteroBib / Google Docs).</a:t>
+            </a:r>
+          </a:p>
+          <a:p>
+            <a:pPr>
+              <a:spcAft>
+                <a:spcPts val="1000"/>
+              </a:spcAft>
+            </a:pPr>
+            <a:r>
+              <a:rPr sz="1600" b="0" i="0">
+                <a:solidFill>
+                  <a:srgbClr val="2B2B2B"/>
+                </a:solidFill>
+                <a:latin typeface="Calibri"/>
+              </a:rPr>
+              <a:t>–   </a:t>
+            </a:r>
+            <a:r>
+              <a:rPr sz="1600" b="1" i="0">
+                <a:solidFill>
+                  <a:srgbClr val="2B2B2B"/>
+                </a:solidFill>
+                <a:latin typeface="Calibri"/>
+              </a:rPr>
+              <a:t>Entregas y notas oficiales:</a:t>
+            </a:r>
+            <a:r>
+              <a:rPr sz="1600" b="0" i="0">
+                <a:solidFill>
+                  <a:srgbClr val="2B2B2B"/>
+                </a:solidFill>
+                <a:latin typeface="Calibri"/>
+              </a:rPr>
+              <a:t> solo por CDigital del curso.</a:t>
+            </a:r>
+          </a:p>
+        </p:txBody>
+      </p:sp>
+      <p:sp>
+        <p:nvSpPr>
+          <p:cNvPr id="5" name="TextBox 4"/>
+          <p:cNvSpPr txBox="1"/>
+          <p:nvPr/>
+        </p:nvSpPr>
+        <p:spPr>
+          <a:xfrm>
+            <a:off x="11094415" y="6446520"/>
+            <a:ext cx="548640" cy="274320"/>
+          </a:xfrm>
+          <a:prstGeom prst="rect">
+            <a:avLst/>
+          </a:prstGeom>
+          <a:noFill/>
+        </p:spPr>
+        <p:txBody>
+          <a:bodyPr wrap="square" anchor="t" lIns="0" rIns="0" tIns="0" bIns="0">
+            <a:spAutoFit/>
+          </a:bodyPr>
+          <a:lstStyle/>
+          <a:p>
+            <a:pPr algn="r"/>
+            <a:r>
+              <a:rPr sz="1000" b="1" i="0">
+                <a:solidFill>
+                  <a:srgbClr val="8F989D"/>
+                </a:solidFill>
+                <a:latin typeface="Calibri"/>
+              </a:rPr>
+              <a:t>11</a:t>
+            </a:r>
+          </a:p>
+        </p:txBody>
+      </p:sp>
+    </p:spTree>
+  </p:cSld>
+  <p:clrMapOvr>
+    <a:masterClrMapping/>
+  </p:clrMapOvr>
+</p:sld>
+</file>
+
+<file path=ppt/slides/slide12.xml><?xml version="1.0" encoding="utf-8"?>
+<p:sld xmlns:a="http://schemas.openxmlformats.org/drawingml/2006/main" xmlns:p="http://schemas.openxmlformats.org/presentationml/2006/main" xmlns:r="http://schemas.openxmlformats.org/officeDocument/2006/relationships">
+  <p:cSld>
+    <p:bg>
+      <p:bgPr>
+        <a:solidFill>
+          <a:srgbClr val="FFFFFF"/>
+        </a:solidFill>
+        <a:effectLst/>
+      </p:bgPr>
+    </p:bg>
+    <p:spTree>
+      <p:nvGrpSpPr>
+        <p:cNvPr id="1" name=""/>
+        <p:cNvGrpSpPr/>
+        <p:nvPr/>
+      </p:nvGrpSpPr>
+      <p:grpSpPr/>
+      <p:sp>
+        <p:nvSpPr>
+          <p:cNvPr id="2" name="Rectangle 1"/>
+          <p:cNvSpPr/>
+          <p:nvPr/>
+        </p:nvSpPr>
+        <p:spPr>
+          <a:xfrm>
+            <a:off x="0" y="0"/>
             <a:ext cx="12191695" cy="164592"/>
           </a:xfrm>
           <a:prstGeom prst="rect">
@@ -6677,7 +7136,7 @@
                 </a:solidFill>
                 <a:latin typeface="Calibri"/>
               </a:rPr>
-              <a:t>03/09/2026</a:t>
+              <a:t>10/09/2026</a:t>
             </a:r>
           </a:p>
         </p:txBody>
@@ -6851,7 +7310,7 @@
                 </a:solidFill>
                 <a:latin typeface="Calibri"/>
               </a:rPr>
-              <a:t>04/09/2026</a:t>
+              <a:t>11/09/2026</a:t>
             </a:r>
           </a:p>
         </p:txBody>
@@ -6946,7 +7405,7 @@
                 </a:solidFill>
                 <a:latin typeface="Calibri"/>
               </a:rPr>
-              <a:t>10/09/2026</a:t>
+              <a:t>20/09/2026</a:t>
             </a:r>
           </a:p>
         </p:txBody>
@@ -7024,7 +7483,79 @@
                 </a:solidFill>
                 <a:latin typeface="Calibri"/>
               </a:rPr>
-              <a:t>Corte 1 = 30% · Corte 2 = 30% · Corte 3 = 40%. Cada ACA evalúa el corte completo (no hay subdivisión en varios EV). Enunciados: Clases/Recursos/ACAs/. Fechas fijadas por el Docente, siempre en el día de clase (jue).</a:t>
+              <a:t>Corte 1 30% = Quiz 1 6% + Parcial 1 24% · Corte 2 30% = Quiz 2 9% + Parcial 2 21% · Corte 3 40% = ACA Final 32,8% + Quiz 3 4% + Autoevaluación 1,6% + Coevaluación 1,6% — libro de calificaciones de </a:t>
+            </a:r>
+            <a:r>
+              <a:rPr sz="1200" b="1" i="0">
+                <a:solidFill>
+                  <a:srgbClr val="2B2B2B"/>
+                </a:solidFill>
+                <a:latin typeface="Calibri"/>
+              </a:rPr>
+              <a:t>CDigital</a:t>
+            </a:r>
+            <a:r>
+              <a:rPr sz="1200" b="0" i="0">
+                <a:solidFill>
+                  <a:srgbClr val="2B2B2B"/>
+                </a:solidFill>
+                <a:latin typeface="Calibri"/>
+              </a:rPr>
+              <a:t>. Quices y parciales: </a:t>
+            </a:r>
+            <a:r>
+              <a:rPr sz="1200" b="1" i="0">
+                <a:solidFill>
+                  <a:srgbClr val="2B2B2B"/>
+                </a:solidFill>
+                <a:latin typeface="Calibri"/>
+              </a:rPr>
+              <a:t>cuestionarios</a:t>
+            </a:r>
+            <a:r>
+              <a:rPr sz="1200" b="0" i="0">
+                <a:solidFill>
+                  <a:srgbClr val="2B2B2B"/>
+                </a:solidFill>
+                <a:latin typeface="Calibri"/>
+              </a:rPr>
+              <a:t> que cierran en día de clase (jue). </a:t>
+            </a:r>
+            <a:r>
+              <a:rPr sz="1200" b="1" i="0">
+                <a:solidFill>
+                  <a:srgbClr val="2B2B2B"/>
+                </a:solidFill>
+                <a:latin typeface="Calibri"/>
+              </a:rPr>
+              <a:t>ACA Final</a:t>
+            </a:r>
+            <a:r>
+              <a:rPr sz="1200" b="0" i="0">
+                <a:solidFill>
+                  <a:srgbClr val="2B2B2B"/>
+                </a:solidFill>
+                <a:latin typeface="Calibri"/>
+              </a:rPr>
+              <a:t> (tarea/documento) cierra </a:t>
+            </a:r>
+            <a:r>
+              <a:rPr sz="1200" b="1" i="0">
+                <a:solidFill>
+                  <a:srgbClr val="2B2B2B"/>
+                </a:solidFill>
+                <a:latin typeface="Calibri"/>
+              </a:rPr>
+              <a:t>12/09/2026</a:t>
+            </a:r>
+            <a:r>
+              <a:rPr sz="1200" b="0" i="0">
+                <a:solidFill>
+                  <a:srgbClr val="2B2B2B"/>
+                </a:solidFill>
+                <a:latin typeface="Calibri"/>
+              </a:rPr>
+              <a:t>. Enunciados: Clases/Recursos/ACAs/.</a:t>
             </a:r>
           </a:p>
         </p:txBody>
@@ -7164,7 +7695,7 @@
                 </a:solidFill>
                 <a:latin typeface="Calibri"/>
               </a:rPr>
-              <a:t>ALCANCE DE LA EVALUACIÓN</a:t>
+              <a:t>CÓMO SE CALIFICA — LOS ÍTEMS DEL AULA (CDIGITAL)</a:t>
             </a:r>
           </a:p>
         </p:txBody>
@@ -7177,8 +7708,8 @@
         </p:nvSpPr>
         <p:spPr>
           <a:xfrm>
-            <a:off x="640080" y="1691639"/>
-            <a:ext cx="10911535" cy="4617720"/>
+            <a:off x="640080" y="1280160"/>
+            <a:ext cx="10911535" cy="411480"/>
           </a:xfrm>
           <a:prstGeom prst="rect">
             <a:avLst/>
@@ -7191,216 +7722,1122 @@
           </a:bodyPr>
           <a:lstStyle/>
           <a:p>
-            <a:pPr>
-              <a:spcAft>
-                <a:spcPts val="1000"/>
-              </a:spcAft>
-            </a:pPr>
-            <a:r>
-              <a:rPr sz="1300" b="0" i="0">
-                <a:solidFill>
-                  <a:srgbClr val="2B2B2B"/>
-                </a:solidFill>
-                <a:latin typeface="Calibri"/>
-              </a:rPr>
-              <a:t>–   </a:t>
-            </a:r>
-            <a:r>
-              <a:rPr sz="1300" b="1" i="0">
-                <a:solidFill>
-                  <a:srgbClr val="2B2B2B"/>
-                </a:solidFill>
-                <a:latin typeface="Calibri"/>
-              </a:rPr>
-              <a:t>Régimen:</a:t>
-            </a:r>
-            <a:r>
-              <a:rPr sz="1300" b="0" i="0">
-                <a:solidFill>
-                  <a:srgbClr val="2B2B2B"/>
-                </a:solidFill>
-                <a:latin typeface="Calibri"/>
-              </a:rPr>
-              <a:t> Art. 52 del Reglamento Estudiantil · </a:t>
-            </a:r>
-            <a:r>
-              <a:rPr sz="1300" b="1" i="0">
-                <a:solidFill>
-                  <a:srgbClr val="2B2B2B"/>
-                </a:solidFill>
-                <a:latin typeface="Calibri"/>
-              </a:rPr>
-              <a:t>Corte 1 = 30% · Corte 2 = 30% · Corte 3 = 40%</a:t>
-            </a:r>
-            <a:r>
-              <a:rPr sz="1300" b="0" i="0">
-                <a:solidFill>
-                  <a:srgbClr val="2B2B2B"/>
-                </a:solidFill>
-                <a:latin typeface="Calibri"/>
-              </a:rPr>
-              <a:t> · Cada ACA evalúa el </a:t>
-            </a:r>
-            <a:r>
-              <a:rPr sz="1300" b="1" i="0">
-                <a:solidFill>
-                  <a:srgbClr val="2B2B2B"/>
-                </a:solidFill>
-                <a:latin typeface="Calibri"/>
-              </a:rPr>
-              <a:t>100% de su corte</a:t>
-            </a:r>
-            <a:r>
-              <a:rPr sz="1300" b="0" i="0">
-                <a:solidFill>
-                  <a:srgbClr val="2B2B2B"/>
-                </a:solidFill>
-                <a:latin typeface="Calibri"/>
-              </a:rPr>
-              <a:t>: ACA 1 = Corte 1, ACA 2 = Corte 2, ACA 3 = Corte 3.</a:t>
-            </a:r>
-          </a:p>
-          <a:p>
-            <a:pPr>
-              <a:spcAft>
-                <a:spcPts val="1000"/>
-              </a:spcAft>
-            </a:pPr>
-            <a:r>
-              <a:rPr sz="1300" b="0" i="0">
-                <a:solidFill>
-                  <a:srgbClr val="2B2B2B"/>
-                </a:solidFill>
-                <a:latin typeface="Calibri"/>
-              </a:rPr>
-              <a:t>–   Autoevaluación y coevaluación </a:t>
-            </a:r>
-            <a:r>
-              <a:rPr sz="1300" b="1" i="0">
-                <a:solidFill>
-                  <a:srgbClr val="2B2B2B"/>
-                </a:solidFill>
-                <a:latin typeface="Calibri"/>
-              </a:rPr>
-              <a:t>con porcentaje propio</a:t>
-            </a:r>
-            <a:r>
-              <a:rPr sz="1300" b="0" i="0">
-                <a:solidFill>
-                  <a:srgbClr val="2B2B2B"/>
-                </a:solidFill>
-                <a:latin typeface="Calibri"/>
-              </a:rPr>
-              <a:t> (modelo AFI Proyecto I: 4% + 4% según ESP329): </a:t>
-            </a:r>
-            <a:r>
-              <a:rPr sz="1300" b="1" i="0">
-                <a:solidFill>
-                  <a:srgbClr val="2B2B2B"/>
-                </a:solidFill>
-                <a:latin typeface="Calibri"/>
-              </a:rPr>
-              <a:t>no aplican</a:t>
-            </a:r>
-            <a:r>
-              <a:rPr sz="1300" b="0" i="0">
-                <a:solidFill>
-                  <a:srgbClr val="2B2B2B"/>
-                </a:solidFill>
-                <a:latin typeface="Calibri"/>
-              </a:rPr>
-              <a:t> en esta asignatura según el syllabus SIAC / Art. 52.</a:t>
-            </a:r>
-          </a:p>
-          <a:p>
-            <a:pPr>
-              <a:spcAft>
-                <a:spcPts val="1000"/>
-              </a:spcAft>
-            </a:pPr>
-            <a:r>
-              <a:rPr sz="1300" b="0" i="0">
-                <a:solidFill>
-                  <a:srgbClr val="2B2B2B"/>
-                </a:solidFill>
-                <a:latin typeface="Calibri"/>
-              </a:rPr>
-              <a:t>–   No confundir con la autoevaluación </a:t>
-            </a:r>
-            <a:r>
-              <a:rPr sz="1300" b="1" i="0">
-                <a:solidFill>
-                  <a:srgbClr val="2B2B2B"/>
-                </a:solidFill>
-                <a:latin typeface="Calibri"/>
-              </a:rPr>
-              <a:t>institucional</a:t>
-            </a:r>
-            <a:r>
-              <a:rPr sz="1300" b="0" i="0">
-                <a:solidFill>
-                  <a:srgbClr val="2B2B2B"/>
-                </a:solidFill>
-                <a:latin typeface="Calibri"/>
-              </a:rPr>
-              <a:t> SIAC (calidad de programas en acreditacion.cun.edu.co): esa no es una nota del curso.</a:t>
-            </a:r>
-          </a:p>
-          <a:p>
-            <a:pPr>
-              <a:spcAft>
-                <a:spcPts val="1000"/>
-              </a:spcAft>
-            </a:pPr>
-            <a:r>
-              <a:rPr sz="1300" b="0" i="0">
-                <a:solidFill>
-                  <a:srgbClr val="2B2B2B"/>
-                </a:solidFill>
-                <a:latin typeface="Calibri"/>
-              </a:rPr>
-              <a:t>–   Entregas, rúbricas EV y publicación de notas: solo por </a:t>
-            </a:r>
-            <a:r>
-              <a:rPr sz="1300" b="1" i="0">
-                <a:solidFill>
-                  <a:srgbClr val="2B2B2B"/>
-                </a:solidFill>
-                <a:latin typeface="Calibri"/>
-              </a:rPr>
-              <a:t>CDigital</a:t>
-            </a:r>
-            <a:r>
-              <a:rPr sz="1300" b="0" i="0">
-                <a:solidFill>
-                  <a:srgbClr val="2B2B2B"/>
-                </a:solidFill>
-                <a:latin typeface="Calibri"/>
-              </a:rPr>
-              <a:t>.</a:t>
-            </a:r>
-          </a:p>
-          <a:p>
-            <a:pPr>
-              <a:spcAft>
-                <a:spcPts val="1000"/>
-              </a:spcAft>
-            </a:pPr>
-            <a:r>
-              <a:rPr sz="1300" b="0" i="0">
-                <a:solidFill>
-                  <a:srgbClr val="2B2B2B"/>
-                </a:solidFill>
-                <a:latin typeface="Calibri"/>
-              </a:rPr>
-              <a:t>–   Si Coordinación publica un instrumento formativo sin peso propio, se anuncia en el aula; no inventamos % fuera del syllabus.</a:t>
-            </a:r>
-          </a:p>
-        </p:txBody>
-      </p:sp>
-      <p:sp>
-        <p:nvSpPr>
-          <p:cNvPr id="5" name="TextBox 4"/>
+            <a:pPr algn="ctr"/>
+            <a:r>
+              <a:rPr sz="1500" b="1" i="0">
+                <a:solidFill>
+                  <a:srgbClr val="2B2B2B"/>
+                </a:solidFill>
+                <a:latin typeface="Calibri"/>
+              </a:rPr>
+              <a:t>Libro de calificaciones del aula</a:t>
+            </a:r>
+            <a:r>
+              <a:rPr sz="1500" b="0" i="0">
+                <a:solidFill>
+                  <a:srgbClr val="2B2B2B"/>
+                </a:solidFill>
+                <a:latin typeface="Calibri"/>
+              </a:rPr>
+              <a:t> (CDigital) · cortes 30% / 30% / 40% · los pesos suman </a:t>
+            </a:r>
+            <a:r>
+              <a:rPr sz="1500" b="1" i="0">
+                <a:solidFill>
+                  <a:srgbClr val="2B2B2B"/>
+                </a:solidFill>
+                <a:latin typeface="Calibri"/>
+              </a:rPr>
+              <a:t>100%</a:t>
+            </a:r>
+          </a:p>
+        </p:txBody>
+      </p:sp>
+      <p:graphicFrame>
+        <p:nvGraphicFramePr>
+          <p:cNvPr id="5" name="Table 4"/>
+          <p:cNvGraphicFramePr>
+            <a:graphicFrameLocks noGrp="1"/>
+          </p:cNvGraphicFramePr>
+          <p:nvPr/>
+        </p:nvGraphicFramePr>
+        <p:xfrm>
+          <a:off x="640080" y="2011679"/>
+          <a:ext cx="10911531" cy="4297680"/>
+        </p:xfrm>
+        <a:graphic>
+          <a:graphicData uri="http://schemas.openxmlformats.org/drawingml/2006/table">
+            <a:tbl>
+              <a:tblPr>
+                <a:tableStyleId>{2D5ABB26-0587-4C30-8999-92F81FD0307C}</a:tableStyleId>
+              </a:tblPr>
+              <a:tblGrid>
+                <a:gridCol w="2220931"/>
+                <a:gridCol w="1448433"/>
+                <a:gridCol w="1448433"/>
+                <a:gridCol w="1351871"/>
+                <a:gridCol w="4441863"/>
+              </a:tblGrid>
+              <a:tr h="477520">
+                <a:tc>
+                  <a:txBody>
+                    <a:bodyPr/>
+                    <a:lstStyle/>
+                    <a:p>
+                      <a:pPr algn="l"/>
+                      <a:r>
+                        <a:rPr sz="1300" b="1" i="0">
+                          <a:solidFill>
+                            <a:srgbClr val="FFFFFF"/>
+                          </a:solidFill>
+                          <a:latin typeface="Calibri"/>
+                        </a:rPr>
+                        <a:t>Ítem en CDigital</a:t>
+                      </a:r>
+                    </a:p>
+                  </a:txBody>
+                  <a:tcPr anchor="ctr" marL="109728" marR="91440" marT="36576" marB="36576">
+                    <a:solidFill>
+                      <a:srgbClr val="0C2340"/>
+                    </a:solidFill>
+                  </a:tcPr>
+                </a:tc>
+                <a:tc>
+                  <a:txBody>
+                    <a:bodyPr/>
+                    <a:lstStyle/>
+                    <a:p>
+                      <a:pPr algn="l"/>
+                      <a:r>
+                        <a:rPr sz="1300" b="1" i="0">
+                          <a:solidFill>
+                            <a:srgbClr val="FFFFFF"/>
+                          </a:solidFill>
+                          <a:latin typeface="Calibri"/>
+                        </a:rPr>
+                        <a:t>Tipo</a:t>
+                      </a:r>
+                    </a:p>
+                  </a:txBody>
+                  <a:tcPr anchor="ctr" marL="109728" marR="91440" marT="36576" marB="36576">
+                    <a:solidFill>
+                      <a:srgbClr val="0C2340"/>
+                    </a:solidFill>
+                  </a:tcPr>
+                </a:tc>
+                <a:tc>
+                  <a:txBody>
+                    <a:bodyPr/>
+                    <a:lstStyle/>
+                    <a:p>
+                      <a:pPr algn="l"/>
+                      <a:r>
+                        <a:rPr sz="1300" b="1" i="0">
+                          <a:solidFill>
+                            <a:srgbClr val="FFFFFF"/>
+                          </a:solidFill>
+                          <a:latin typeface="Calibri"/>
+                        </a:rPr>
+                        <a:t>Corte (peso)</a:t>
+                      </a:r>
+                    </a:p>
+                  </a:txBody>
+                  <a:tcPr anchor="ctr" marL="109728" marR="91440" marT="36576" marB="36576">
+                    <a:solidFill>
+                      <a:srgbClr val="0C2340"/>
+                    </a:solidFill>
+                  </a:tcPr>
+                </a:tc>
+                <a:tc>
+                  <a:txBody>
+                    <a:bodyPr/>
+                    <a:lstStyle/>
+                    <a:p>
+                      <a:pPr algn="l"/>
+                      <a:r>
+                        <a:rPr sz="1300" b="1" i="0">
+                          <a:solidFill>
+                            <a:srgbClr val="FFFFFF"/>
+                          </a:solidFill>
+                          <a:latin typeface="Calibri"/>
+                        </a:rPr>
+                        <a:t>Peso del ítem</a:t>
+                      </a:r>
+                    </a:p>
+                  </a:txBody>
+                  <a:tcPr anchor="ctr" marL="109728" marR="91440" marT="36576" marB="36576">
+                    <a:solidFill>
+                      <a:srgbClr val="0C2340"/>
+                    </a:solidFill>
+                  </a:tcPr>
+                </a:tc>
+                <a:tc>
+                  <a:txBody>
+                    <a:bodyPr/>
+                    <a:lstStyle/>
+                    <a:p>
+                      <a:pPr algn="l"/>
+                      <a:r>
+                        <a:rPr sz="1300" b="1" i="0">
+                          <a:solidFill>
+                            <a:srgbClr val="FFFFFF"/>
+                          </a:solidFill>
+                          <a:latin typeface="Calibri"/>
+                        </a:rPr>
+                        <a:t>Cierre</a:t>
+                      </a:r>
+                    </a:p>
+                  </a:txBody>
+                  <a:tcPr anchor="ctr" marL="109728" marR="91440" marT="36576" marB="36576">
+                    <a:solidFill>
+                      <a:srgbClr val="0C2340"/>
+                    </a:solidFill>
+                  </a:tcPr>
+                </a:tc>
+              </a:tr>
+              <a:tr h="477520">
+                <a:tc>
+                  <a:txBody>
+                    <a:bodyPr/>
+                    <a:lstStyle/>
+                    <a:p>
+                      <a:pPr algn="l"/>
+                      <a:r>
+                        <a:rPr sz="1100" b="1" i="0">
+                          <a:solidFill>
+                            <a:srgbClr val="2B2B2B"/>
+                          </a:solidFill>
+                          <a:latin typeface="Calibri"/>
+                        </a:rPr>
+                        <a:t>Quiz 1</a:t>
+                      </a:r>
+                    </a:p>
+                  </a:txBody>
+                  <a:tcPr anchor="ctr" marL="109728" marR="91440" marT="36576" marB="36576">
+                    <a:solidFill>
+                      <a:srgbClr val="FFFFFF"/>
+                    </a:solidFill>
+                  </a:tcPr>
+                </a:tc>
+                <a:tc>
+                  <a:txBody>
+                    <a:bodyPr/>
+                    <a:lstStyle/>
+                    <a:p>
+                      <a:pPr algn="l"/>
+                      <a:r>
+                        <a:rPr sz="1100" b="0" i="0">
+                          <a:solidFill>
+                            <a:srgbClr val="2B2B2B"/>
+                          </a:solidFill>
+                          <a:latin typeface="Calibri"/>
+                        </a:rPr>
+                        <a:t>Cuestionario</a:t>
+                      </a:r>
+                    </a:p>
+                  </a:txBody>
+                  <a:tcPr anchor="ctr" marL="109728" marR="91440" marT="36576" marB="36576">
+                    <a:solidFill>
+                      <a:srgbClr val="FFFFFF"/>
+                    </a:solidFill>
+                  </a:tcPr>
+                </a:tc>
+                <a:tc>
+                  <a:txBody>
+                    <a:bodyPr/>
+                    <a:lstStyle/>
+                    <a:p>
+                      <a:pPr algn="l"/>
+                      <a:r>
+                        <a:rPr sz="1100" b="0" i="0">
+                          <a:solidFill>
+                            <a:srgbClr val="2B2B2B"/>
+                          </a:solidFill>
+                          <a:latin typeface="Calibri"/>
+                        </a:rPr>
+                        <a:t>1 (30%)</a:t>
+                      </a:r>
+                    </a:p>
+                  </a:txBody>
+                  <a:tcPr anchor="ctr" marL="109728" marR="91440" marT="36576" marB="36576">
+                    <a:solidFill>
+                      <a:srgbClr val="FFFFFF"/>
+                    </a:solidFill>
+                  </a:tcPr>
+                </a:tc>
+                <a:tc>
+                  <a:txBody>
+                    <a:bodyPr/>
+                    <a:lstStyle/>
+                    <a:p>
+                      <a:pPr algn="l"/>
+                      <a:r>
+                        <a:rPr sz="1100" b="1" i="0">
+                          <a:solidFill>
+                            <a:srgbClr val="2B2B2B"/>
+                          </a:solidFill>
+                          <a:latin typeface="Calibri"/>
+                        </a:rPr>
+                        <a:t>6%</a:t>
+                      </a:r>
+                    </a:p>
+                  </a:txBody>
+                  <a:tcPr anchor="ctr" marL="109728" marR="91440" marT="36576" marB="36576">
+                    <a:solidFill>
+                      <a:srgbClr val="FFFFFF"/>
+                    </a:solidFill>
+                  </a:tcPr>
+                </a:tc>
+                <a:tc>
+                  <a:txBody>
+                    <a:bodyPr/>
+                    <a:lstStyle/>
+                    <a:p>
+                      <a:pPr algn="l"/>
+                      <a:r>
+                        <a:rPr sz="1100" b="0" i="0">
+                          <a:solidFill>
+                            <a:srgbClr val="2B2B2B"/>
+                          </a:solidFill>
+                          <a:latin typeface="Calibri"/>
+                        </a:rPr>
+                        <a:t>20/08/2026</a:t>
+                      </a:r>
+                    </a:p>
+                  </a:txBody>
+                  <a:tcPr anchor="ctr" marL="109728" marR="91440" marT="36576" marB="36576">
+                    <a:solidFill>
+                      <a:srgbClr val="FFFFFF"/>
+                    </a:solidFill>
+                  </a:tcPr>
+                </a:tc>
+              </a:tr>
+              <a:tr h="477520">
+                <a:tc>
+                  <a:txBody>
+                    <a:bodyPr/>
+                    <a:lstStyle/>
+                    <a:p>
+                      <a:pPr algn="l"/>
+                      <a:r>
+                        <a:rPr sz="1100" b="1" i="0">
+                          <a:solidFill>
+                            <a:srgbClr val="2B2B2B"/>
+                          </a:solidFill>
+                          <a:latin typeface="Calibri"/>
+                        </a:rPr>
+                        <a:t>Parcial 1</a:t>
+                      </a:r>
+                    </a:p>
+                  </a:txBody>
+                  <a:tcPr anchor="ctr" marL="109728" marR="91440" marT="36576" marB="36576">
+                    <a:solidFill>
+                      <a:srgbClr val="F2F2F2"/>
+                    </a:solidFill>
+                  </a:tcPr>
+                </a:tc>
+                <a:tc>
+                  <a:txBody>
+                    <a:bodyPr/>
+                    <a:lstStyle/>
+                    <a:p>
+                      <a:pPr algn="l"/>
+                      <a:r>
+                        <a:rPr sz="1100" b="0" i="0">
+                          <a:solidFill>
+                            <a:srgbClr val="2B2B2B"/>
+                          </a:solidFill>
+                          <a:latin typeface="Calibri"/>
+                        </a:rPr>
+                        <a:t>Cuestionario</a:t>
+                      </a:r>
+                    </a:p>
+                  </a:txBody>
+                  <a:tcPr anchor="ctr" marL="109728" marR="91440" marT="36576" marB="36576">
+                    <a:solidFill>
+                      <a:srgbClr val="F2F2F2"/>
+                    </a:solidFill>
+                  </a:tcPr>
+                </a:tc>
+                <a:tc>
+                  <a:txBody>
+                    <a:bodyPr/>
+                    <a:lstStyle/>
+                    <a:p>
+                      <a:pPr algn="l"/>
+                      <a:r>
+                        <a:rPr sz="1100" b="0" i="0">
+                          <a:solidFill>
+                            <a:srgbClr val="2B2B2B"/>
+                          </a:solidFill>
+                          <a:latin typeface="Calibri"/>
+                        </a:rPr>
+                        <a:t>1 (30%)</a:t>
+                      </a:r>
+                    </a:p>
+                  </a:txBody>
+                  <a:tcPr anchor="ctr" marL="109728" marR="91440" marT="36576" marB="36576">
+                    <a:solidFill>
+                      <a:srgbClr val="F2F2F2"/>
+                    </a:solidFill>
+                  </a:tcPr>
+                </a:tc>
+                <a:tc>
+                  <a:txBody>
+                    <a:bodyPr/>
+                    <a:lstStyle/>
+                    <a:p>
+                      <a:pPr algn="l"/>
+                      <a:r>
+                        <a:rPr sz="1100" b="1" i="0">
+                          <a:solidFill>
+                            <a:srgbClr val="2B2B2B"/>
+                          </a:solidFill>
+                          <a:latin typeface="Calibri"/>
+                        </a:rPr>
+                        <a:t>24%</a:t>
+                      </a:r>
+                    </a:p>
+                  </a:txBody>
+                  <a:tcPr anchor="ctr" marL="109728" marR="91440" marT="36576" marB="36576">
+                    <a:solidFill>
+                      <a:srgbClr val="F2F2F2"/>
+                    </a:solidFill>
+                  </a:tcPr>
+                </a:tc>
+                <a:tc>
+                  <a:txBody>
+                    <a:bodyPr/>
+                    <a:lstStyle/>
+                    <a:p>
+                      <a:pPr algn="l"/>
+                      <a:r>
+                        <a:rPr sz="1100" b="0" i="0">
+                          <a:solidFill>
+                            <a:srgbClr val="2B2B2B"/>
+                          </a:solidFill>
+                          <a:latin typeface="Calibri"/>
+                        </a:rPr>
+                        <a:t>27/08/2026</a:t>
+                      </a:r>
+                    </a:p>
+                  </a:txBody>
+                  <a:tcPr anchor="ctr" marL="109728" marR="91440" marT="36576" marB="36576">
+                    <a:solidFill>
+                      <a:srgbClr val="F2F2F2"/>
+                    </a:solidFill>
+                  </a:tcPr>
+                </a:tc>
+              </a:tr>
+              <a:tr h="477520">
+                <a:tc>
+                  <a:txBody>
+                    <a:bodyPr/>
+                    <a:lstStyle/>
+                    <a:p>
+                      <a:pPr algn="l"/>
+                      <a:r>
+                        <a:rPr sz="1100" b="1" i="0">
+                          <a:solidFill>
+                            <a:srgbClr val="2B2B2B"/>
+                          </a:solidFill>
+                          <a:latin typeface="Calibri"/>
+                        </a:rPr>
+                        <a:t>Quiz 2</a:t>
+                      </a:r>
+                    </a:p>
+                  </a:txBody>
+                  <a:tcPr anchor="ctr" marL="109728" marR="91440" marT="36576" marB="36576">
+                    <a:solidFill>
+                      <a:srgbClr val="FFFFFF"/>
+                    </a:solidFill>
+                  </a:tcPr>
+                </a:tc>
+                <a:tc>
+                  <a:txBody>
+                    <a:bodyPr/>
+                    <a:lstStyle/>
+                    <a:p>
+                      <a:pPr algn="l"/>
+                      <a:r>
+                        <a:rPr sz="1100" b="0" i="0">
+                          <a:solidFill>
+                            <a:srgbClr val="2B2B2B"/>
+                          </a:solidFill>
+                          <a:latin typeface="Calibri"/>
+                        </a:rPr>
+                        <a:t>Cuestionario</a:t>
+                      </a:r>
+                    </a:p>
+                  </a:txBody>
+                  <a:tcPr anchor="ctr" marL="109728" marR="91440" marT="36576" marB="36576">
+                    <a:solidFill>
+                      <a:srgbClr val="FFFFFF"/>
+                    </a:solidFill>
+                  </a:tcPr>
+                </a:tc>
+                <a:tc>
+                  <a:txBody>
+                    <a:bodyPr/>
+                    <a:lstStyle/>
+                    <a:p>
+                      <a:pPr algn="l"/>
+                      <a:r>
+                        <a:rPr sz="1100" b="0" i="0">
+                          <a:solidFill>
+                            <a:srgbClr val="2B2B2B"/>
+                          </a:solidFill>
+                          <a:latin typeface="Calibri"/>
+                        </a:rPr>
+                        <a:t>2 (30%)</a:t>
+                      </a:r>
+                    </a:p>
+                  </a:txBody>
+                  <a:tcPr anchor="ctr" marL="109728" marR="91440" marT="36576" marB="36576">
+                    <a:solidFill>
+                      <a:srgbClr val="FFFFFF"/>
+                    </a:solidFill>
+                  </a:tcPr>
+                </a:tc>
+                <a:tc>
+                  <a:txBody>
+                    <a:bodyPr/>
+                    <a:lstStyle/>
+                    <a:p>
+                      <a:pPr algn="l"/>
+                      <a:r>
+                        <a:rPr sz="1100" b="1" i="0">
+                          <a:solidFill>
+                            <a:srgbClr val="2B2B2B"/>
+                          </a:solidFill>
+                          <a:latin typeface="Calibri"/>
+                        </a:rPr>
+                        <a:t>9%</a:t>
+                      </a:r>
+                    </a:p>
+                  </a:txBody>
+                  <a:tcPr anchor="ctr" marL="109728" marR="91440" marT="36576" marB="36576">
+                    <a:solidFill>
+                      <a:srgbClr val="FFFFFF"/>
+                    </a:solidFill>
+                  </a:tcPr>
+                </a:tc>
+                <a:tc>
+                  <a:txBody>
+                    <a:bodyPr/>
+                    <a:lstStyle/>
+                    <a:p>
+                      <a:pPr algn="l"/>
+                      <a:r>
+                        <a:rPr sz="1100" b="0" i="0">
+                          <a:solidFill>
+                            <a:srgbClr val="2B2B2B"/>
+                          </a:solidFill>
+                          <a:latin typeface="Calibri"/>
+                        </a:rPr>
+                        <a:t>03/09/2026</a:t>
+                      </a:r>
+                    </a:p>
+                  </a:txBody>
+                  <a:tcPr anchor="ctr" marL="109728" marR="91440" marT="36576" marB="36576">
+                    <a:solidFill>
+                      <a:srgbClr val="FFFFFF"/>
+                    </a:solidFill>
+                  </a:tcPr>
+                </a:tc>
+              </a:tr>
+              <a:tr h="477520">
+                <a:tc>
+                  <a:txBody>
+                    <a:bodyPr/>
+                    <a:lstStyle/>
+                    <a:p>
+                      <a:pPr algn="l"/>
+                      <a:r>
+                        <a:rPr sz="1100" b="1" i="0">
+                          <a:solidFill>
+                            <a:srgbClr val="2B2B2B"/>
+                          </a:solidFill>
+                          <a:latin typeface="Calibri"/>
+                        </a:rPr>
+                        <a:t>Parcial 2</a:t>
+                      </a:r>
+                    </a:p>
+                  </a:txBody>
+                  <a:tcPr anchor="ctr" marL="109728" marR="91440" marT="36576" marB="36576">
+                    <a:solidFill>
+                      <a:srgbClr val="F2F2F2"/>
+                    </a:solidFill>
+                  </a:tcPr>
+                </a:tc>
+                <a:tc>
+                  <a:txBody>
+                    <a:bodyPr/>
+                    <a:lstStyle/>
+                    <a:p>
+                      <a:pPr algn="l"/>
+                      <a:r>
+                        <a:rPr sz="1100" b="0" i="0">
+                          <a:solidFill>
+                            <a:srgbClr val="2B2B2B"/>
+                          </a:solidFill>
+                          <a:latin typeface="Calibri"/>
+                        </a:rPr>
+                        <a:t>Cuestionario</a:t>
+                      </a:r>
+                    </a:p>
+                  </a:txBody>
+                  <a:tcPr anchor="ctr" marL="109728" marR="91440" marT="36576" marB="36576">
+                    <a:solidFill>
+                      <a:srgbClr val="F2F2F2"/>
+                    </a:solidFill>
+                  </a:tcPr>
+                </a:tc>
+                <a:tc>
+                  <a:txBody>
+                    <a:bodyPr/>
+                    <a:lstStyle/>
+                    <a:p>
+                      <a:pPr algn="l"/>
+                      <a:r>
+                        <a:rPr sz="1100" b="0" i="0">
+                          <a:solidFill>
+                            <a:srgbClr val="2B2B2B"/>
+                          </a:solidFill>
+                          <a:latin typeface="Calibri"/>
+                        </a:rPr>
+                        <a:t>2 (30%)</a:t>
+                      </a:r>
+                    </a:p>
+                  </a:txBody>
+                  <a:tcPr anchor="ctr" marL="109728" marR="91440" marT="36576" marB="36576">
+                    <a:solidFill>
+                      <a:srgbClr val="F2F2F2"/>
+                    </a:solidFill>
+                  </a:tcPr>
+                </a:tc>
+                <a:tc>
+                  <a:txBody>
+                    <a:bodyPr/>
+                    <a:lstStyle/>
+                    <a:p>
+                      <a:pPr algn="l"/>
+                      <a:r>
+                        <a:rPr sz="1100" b="1" i="0">
+                          <a:solidFill>
+                            <a:srgbClr val="2B2B2B"/>
+                          </a:solidFill>
+                          <a:latin typeface="Calibri"/>
+                        </a:rPr>
+                        <a:t>21%</a:t>
+                      </a:r>
+                    </a:p>
+                  </a:txBody>
+                  <a:tcPr anchor="ctr" marL="109728" marR="91440" marT="36576" marB="36576">
+                    <a:solidFill>
+                      <a:srgbClr val="F2F2F2"/>
+                    </a:solidFill>
+                  </a:tcPr>
+                </a:tc>
+                <a:tc>
+                  <a:txBody>
+                    <a:bodyPr/>
+                    <a:lstStyle/>
+                    <a:p>
+                      <a:pPr algn="l"/>
+                      <a:r>
+                        <a:rPr sz="1100" b="0" i="0">
+                          <a:solidFill>
+                            <a:srgbClr val="2B2B2B"/>
+                          </a:solidFill>
+                          <a:latin typeface="Calibri"/>
+                        </a:rPr>
+                        <a:t>10/09/2026</a:t>
+                      </a:r>
+                    </a:p>
+                  </a:txBody>
+                  <a:tcPr anchor="ctr" marL="109728" marR="91440" marT="36576" marB="36576">
+                    <a:solidFill>
+                      <a:srgbClr val="F2F2F2"/>
+                    </a:solidFill>
+                  </a:tcPr>
+                </a:tc>
+              </a:tr>
+              <a:tr h="477520">
+                <a:tc>
+                  <a:txBody>
+                    <a:bodyPr/>
+                    <a:lstStyle/>
+                    <a:p>
+                      <a:pPr algn="l"/>
+                      <a:r>
+                        <a:rPr sz="1100" b="1" i="0">
+                          <a:solidFill>
+                            <a:srgbClr val="2B2B2B"/>
+                          </a:solidFill>
+                          <a:latin typeface="Calibri"/>
+                        </a:rPr>
+                        <a:t>ACA Final</a:t>
+                      </a:r>
+                    </a:p>
+                  </a:txBody>
+                  <a:tcPr anchor="ctr" marL="109728" marR="91440" marT="36576" marB="36576">
+                    <a:solidFill>
+                      <a:srgbClr val="FFFFFF"/>
+                    </a:solidFill>
+                  </a:tcPr>
+                </a:tc>
+                <a:tc>
+                  <a:txBody>
+                    <a:bodyPr/>
+                    <a:lstStyle/>
+                    <a:p>
+                      <a:pPr algn="l"/>
+                      <a:r>
+                        <a:rPr sz="1100" b="0" i="0">
+                          <a:solidFill>
+                            <a:srgbClr val="2B2B2B"/>
+                          </a:solidFill>
+                          <a:latin typeface="Calibri"/>
+                        </a:rPr>
+                        <a:t>Tarea</a:t>
+                      </a:r>
+                    </a:p>
+                  </a:txBody>
+                  <a:tcPr anchor="ctr" marL="109728" marR="91440" marT="36576" marB="36576">
+                    <a:solidFill>
+                      <a:srgbClr val="FFFFFF"/>
+                    </a:solidFill>
+                  </a:tcPr>
+                </a:tc>
+                <a:tc>
+                  <a:txBody>
+                    <a:bodyPr/>
+                    <a:lstStyle/>
+                    <a:p>
+                      <a:pPr algn="l"/>
+                      <a:r>
+                        <a:rPr sz="1100" b="0" i="0">
+                          <a:solidFill>
+                            <a:srgbClr val="2B2B2B"/>
+                          </a:solidFill>
+                          <a:latin typeface="Calibri"/>
+                        </a:rPr>
+                        <a:t>3 (40%)</a:t>
+                      </a:r>
+                    </a:p>
+                  </a:txBody>
+                  <a:tcPr anchor="ctr" marL="109728" marR="91440" marT="36576" marB="36576">
+                    <a:solidFill>
+                      <a:srgbClr val="FFFFFF"/>
+                    </a:solidFill>
+                  </a:tcPr>
+                </a:tc>
+                <a:tc>
+                  <a:txBody>
+                    <a:bodyPr/>
+                    <a:lstStyle/>
+                    <a:p>
+                      <a:pPr algn="l"/>
+                      <a:r>
+                        <a:rPr sz="1100" b="1" i="0">
+                          <a:solidFill>
+                            <a:srgbClr val="2B2B2B"/>
+                          </a:solidFill>
+                          <a:latin typeface="Calibri"/>
+                        </a:rPr>
+                        <a:t>32,8%</a:t>
+                      </a:r>
+                    </a:p>
+                  </a:txBody>
+                  <a:tcPr anchor="ctr" marL="109728" marR="91440" marT="36576" marB="36576">
+                    <a:solidFill>
+                      <a:srgbClr val="FFFFFF"/>
+                    </a:solidFill>
+                  </a:tcPr>
+                </a:tc>
+                <a:tc>
+                  <a:txBody>
+                    <a:bodyPr/>
+                    <a:lstStyle/>
+                    <a:p>
+                      <a:pPr algn="l"/>
+                      <a:r>
+                        <a:rPr sz="1100" b="0" i="0">
+                          <a:solidFill>
+                            <a:srgbClr val="2B2B2B"/>
+                          </a:solidFill>
+                          <a:latin typeface="Calibri"/>
+                        </a:rPr>
+                        <a:t>12/09/2026</a:t>
+                      </a:r>
+                    </a:p>
+                  </a:txBody>
+                  <a:tcPr anchor="ctr" marL="109728" marR="91440" marT="36576" marB="36576">
+                    <a:solidFill>
+                      <a:srgbClr val="FFFFFF"/>
+                    </a:solidFill>
+                  </a:tcPr>
+                </a:tc>
+              </a:tr>
+              <a:tr h="477520">
+                <a:tc>
+                  <a:txBody>
+                    <a:bodyPr/>
+                    <a:lstStyle/>
+                    <a:p>
+                      <a:pPr algn="l"/>
+                      <a:r>
+                        <a:rPr sz="1100" b="1" i="0">
+                          <a:solidFill>
+                            <a:srgbClr val="2B2B2B"/>
+                          </a:solidFill>
+                          <a:latin typeface="Calibri"/>
+                        </a:rPr>
+                        <a:t>Quiz 3</a:t>
+                      </a:r>
+                    </a:p>
+                  </a:txBody>
+                  <a:tcPr anchor="ctr" marL="109728" marR="91440" marT="36576" marB="36576">
+                    <a:solidFill>
+                      <a:srgbClr val="F2F2F2"/>
+                    </a:solidFill>
+                  </a:tcPr>
+                </a:tc>
+                <a:tc>
+                  <a:txBody>
+                    <a:bodyPr/>
+                    <a:lstStyle/>
+                    <a:p>
+                      <a:pPr algn="l"/>
+                      <a:r>
+                        <a:rPr sz="1100" b="0" i="0">
+                          <a:solidFill>
+                            <a:srgbClr val="2B2B2B"/>
+                          </a:solidFill>
+                          <a:latin typeface="Calibri"/>
+                        </a:rPr>
+                        <a:t>Cuestionario</a:t>
+                      </a:r>
+                    </a:p>
+                  </a:txBody>
+                  <a:tcPr anchor="ctr" marL="109728" marR="91440" marT="36576" marB="36576">
+                    <a:solidFill>
+                      <a:srgbClr val="F2F2F2"/>
+                    </a:solidFill>
+                  </a:tcPr>
+                </a:tc>
+                <a:tc>
+                  <a:txBody>
+                    <a:bodyPr/>
+                    <a:lstStyle/>
+                    <a:p>
+                      <a:pPr algn="l"/>
+                      <a:r>
+                        <a:rPr sz="1100" b="0" i="0">
+                          <a:solidFill>
+                            <a:srgbClr val="2B2B2B"/>
+                          </a:solidFill>
+                          <a:latin typeface="Calibri"/>
+                        </a:rPr>
+                        <a:t>3 (40%)</a:t>
+                      </a:r>
+                    </a:p>
+                  </a:txBody>
+                  <a:tcPr anchor="ctr" marL="109728" marR="91440" marT="36576" marB="36576">
+                    <a:solidFill>
+                      <a:srgbClr val="F2F2F2"/>
+                    </a:solidFill>
+                  </a:tcPr>
+                </a:tc>
+                <a:tc>
+                  <a:txBody>
+                    <a:bodyPr/>
+                    <a:lstStyle/>
+                    <a:p>
+                      <a:pPr algn="l"/>
+                      <a:r>
+                        <a:rPr sz="1100" b="1" i="0">
+                          <a:solidFill>
+                            <a:srgbClr val="2B2B2B"/>
+                          </a:solidFill>
+                          <a:latin typeface="Calibri"/>
+                        </a:rPr>
+                        <a:t>4%</a:t>
+                      </a:r>
+                    </a:p>
+                  </a:txBody>
+                  <a:tcPr anchor="ctr" marL="109728" marR="91440" marT="36576" marB="36576">
+                    <a:solidFill>
+                      <a:srgbClr val="F2F2F2"/>
+                    </a:solidFill>
+                  </a:tcPr>
+                </a:tc>
+                <a:tc>
+                  <a:txBody>
+                    <a:bodyPr/>
+                    <a:lstStyle/>
+                    <a:p>
+                      <a:pPr algn="l"/>
+                      <a:r>
+                        <a:rPr sz="1100" b="0" i="0">
+                          <a:solidFill>
+                            <a:srgbClr val="2B2B2B"/>
+                          </a:solidFill>
+                          <a:latin typeface="Calibri"/>
+                        </a:rPr>
+                        <a:t>17/09/2026</a:t>
+                      </a:r>
+                    </a:p>
+                  </a:txBody>
+                  <a:tcPr anchor="ctr" marL="109728" marR="91440" marT="36576" marB="36576">
+                    <a:solidFill>
+                      <a:srgbClr val="F2F2F2"/>
+                    </a:solidFill>
+                  </a:tcPr>
+                </a:tc>
+              </a:tr>
+              <a:tr h="477520">
+                <a:tc>
+                  <a:txBody>
+                    <a:bodyPr/>
+                    <a:lstStyle/>
+                    <a:p>
+                      <a:pPr algn="l"/>
+                      <a:r>
+                        <a:rPr sz="1100" b="1" i="0">
+                          <a:solidFill>
+                            <a:srgbClr val="2B2B2B"/>
+                          </a:solidFill>
+                          <a:latin typeface="Calibri"/>
+                        </a:rPr>
+                        <a:t>Autoevaluación</a:t>
+                      </a:r>
+                    </a:p>
+                  </a:txBody>
+                  <a:tcPr anchor="ctr" marL="109728" marR="91440" marT="36576" marB="36576">
+                    <a:solidFill>
+                      <a:srgbClr val="FFFFFF"/>
+                    </a:solidFill>
+                  </a:tcPr>
+                </a:tc>
+                <a:tc>
+                  <a:txBody>
+                    <a:bodyPr/>
+                    <a:lstStyle/>
+                    <a:p>
+                      <a:pPr algn="l"/>
+                      <a:r>
+                        <a:rPr sz="1100" b="0" i="0">
+                          <a:solidFill>
+                            <a:srgbClr val="2B2B2B"/>
+                          </a:solidFill>
+                          <a:latin typeface="Calibri"/>
+                        </a:rPr>
+                        <a:t>Cuestionario</a:t>
+                      </a:r>
+                    </a:p>
+                  </a:txBody>
+                  <a:tcPr anchor="ctr" marL="109728" marR="91440" marT="36576" marB="36576">
+                    <a:solidFill>
+                      <a:srgbClr val="FFFFFF"/>
+                    </a:solidFill>
+                  </a:tcPr>
+                </a:tc>
+                <a:tc>
+                  <a:txBody>
+                    <a:bodyPr/>
+                    <a:lstStyle/>
+                    <a:p>
+                      <a:pPr algn="l"/>
+                      <a:r>
+                        <a:rPr sz="1100" b="0" i="0">
+                          <a:solidFill>
+                            <a:srgbClr val="2B2B2B"/>
+                          </a:solidFill>
+                          <a:latin typeface="Calibri"/>
+                        </a:rPr>
+                        <a:t>3 (40%)</a:t>
+                      </a:r>
+                    </a:p>
+                  </a:txBody>
+                  <a:tcPr anchor="ctr" marL="109728" marR="91440" marT="36576" marB="36576">
+                    <a:solidFill>
+                      <a:srgbClr val="FFFFFF"/>
+                    </a:solidFill>
+                  </a:tcPr>
+                </a:tc>
+                <a:tc>
+                  <a:txBody>
+                    <a:bodyPr/>
+                    <a:lstStyle/>
+                    <a:p>
+                      <a:pPr algn="l"/>
+                      <a:r>
+                        <a:rPr sz="1100" b="1" i="0">
+                          <a:solidFill>
+                            <a:srgbClr val="2B2B2B"/>
+                          </a:solidFill>
+                          <a:latin typeface="Calibri"/>
+                        </a:rPr>
+                        <a:t>1,6%</a:t>
+                      </a:r>
+                    </a:p>
+                  </a:txBody>
+                  <a:tcPr anchor="ctr" marL="109728" marR="91440" marT="36576" marB="36576">
+                    <a:solidFill>
+                      <a:srgbClr val="FFFFFF"/>
+                    </a:solidFill>
+                  </a:tcPr>
+                </a:tc>
+                <a:tc>
+                  <a:txBody>
+                    <a:bodyPr/>
+                    <a:lstStyle/>
+                    <a:p>
+                      <a:pPr algn="l"/>
+                      <a:r>
+                        <a:rPr sz="1100" b="0" i="0">
+                          <a:solidFill>
+                            <a:srgbClr val="2B2B2B"/>
+                          </a:solidFill>
+                          <a:latin typeface="Calibri"/>
+                        </a:rPr>
+                        <a:t>20/09/2026</a:t>
+                      </a:r>
+                    </a:p>
+                  </a:txBody>
+                  <a:tcPr anchor="ctr" marL="109728" marR="91440" marT="36576" marB="36576">
+                    <a:solidFill>
+                      <a:srgbClr val="FFFFFF"/>
+                    </a:solidFill>
+                  </a:tcPr>
+                </a:tc>
+              </a:tr>
+              <a:tr h="477520">
+                <a:tc>
+                  <a:txBody>
+                    <a:bodyPr/>
+                    <a:lstStyle/>
+                    <a:p>
+                      <a:pPr algn="l"/>
+                      <a:r>
+                        <a:rPr sz="1100" b="1" i="0">
+                          <a:solidFill>
+                            <a:srgbClr val="2B2B2B"/>
+                          </a:solidFill>
+                          <a:latin typeface="Calibri"/>
+                        </a:rPr>
+                        <a:t>Coevaluación</a:t>
+                      </a:r>
+                    </a:p>
+                  </a:txBody>
+                  <a:tcPr anchor="ctr" marL="109728" marR="91440" marT="36576" marB="36576">
+                    <a:solidFill>
+                      <a:srgbClr val="F2F2F2"/>
+                    </a:solidFill>
+                  </a:tcPr>
+                </a:tc>
+                <a:tc>
+                  <a:txBody>
+                    <a:bodyPr/>
+                    <a:lstStyle/>
+                    <a:p>
+                      <a:pPr algn="l"/>
+                      <a:r>
+                        <a:rPr sz="1100" b="0" i="0">
+                          <a:solidFill>
+                            <a:srgbClr val="2B2B2B"/>
+                          </a:solidFill>
+                          <a:latin typeface="Calibri"/>
+                        </a:rPr>
+                        <a:t>Foro</a:t>
+                      </a:r>
+                    </a:p>
+                  </a:txBody>
+                  <a:tcPr anchor="ctr" marL="109728" marR="91440" marT="36576" marB="36576">
+                    <a:solidFill>
+                      <a:srgbClr val="F2F2F2"/>
+                    </a:solidFill>
+                  </a:tcPr>
+                </a:tc>
+                <a:tc>
+                  <a:txBody>
+                    <a:bodyPr/>
+                    <a:lstStyle/>
+                    <a:p>
+                      <a:pPr algn="l"/>
+                      <a:r>
+                        <a:rPr sz="1100" b="0" i="0">
+                          <a:solidFill>
+                            <a:srgbClr val="2B2B2B"/>
+                          </a:solidFill>
+                          <a:latin typeface="Calibri"/>
+                        </a:rPr>
+                        <a:t>3 (40%)</a:t>
+                      </a:r>
+                    </a:p>
+                  </a:txBody>
+                  <a:tcPr anchor="ctr" marL="109728" marR="91440" marT="36576" marB="36576">
+                    <a:solidFill>
+                      <a:srgbClr val="F2F2F2"/>
+                    </a:solidFill>
+                  </a:tcPr>
+                </a:tc>
+                <a:tc>
+                  <a:txBody>
+                    <a:bodyPr/>
+                    <a:lstStyle/>
+                    <a:p>
+                      <a:pPr algn="l"/>
+                      <a:r>
+                        <a:rPr sz="1100" b="1" i="0">
+                          <a:solidFill>
+                            <a:srgbClr val="2B2B2B"/>
+                          </a:solidFill>
+                          <a:latin typeface="Calibri"/>
+                        </a:rPr>
+                        <a:t>1,6%</a:t>
+                      </a:r>
+                    </a:p>
+                  </a:txBody>
+                  <a:tcPr anchor="ctr" marL="109728" marR="91440" marT="36576" marB="36576">
+                    <a:solidFill>
+                      <a:srgbClr val="F2F2F2"/>
+                    </a:solidFill>
+                  </a:tcPr>
+                </a:tc>
+                <a:tc>
+                  <a:txBody>
+                    <a:bodyPr/>
+                    <a:lstStyle/>
+                    <a:p>
+                      <a:pPr algn="l"/>
+                      <a:r>
+                        <a:rPr sz="1100" b="0" i="0">
+                          <a:solidFill>
+                            <a:srgbClr val="2B2B2B"/>
+                          </a:solidFill>
+                          <a:latin typeface="Calibri"/>
+                        </a:rPr>
+                        <a:t>20/09/2026</a:t>
+                      </a:r>
+                    </a:p>
+                  </a:txBody>
+                  <a:tcPr anchor="ctr" marL="109728" marR="91440" marT="36576" marB="36576">
+                    <a:solidFill>
+                      <a:srgbClr val="F2F2F2"/>
+                    </a:solidFill>
+                  </a:tcPr>
+                </a:tc>
+              </a:tr>
+            </a:tbl>
+          </a:graphicData>
+        </a:graphic>
+      </p:graphicFrame>
+      <p:sp>
+        <p:nvSpPr>
+          <p:cNvPr id="6" name="TextBox 5"/>
           <p:cNvSpPr txBox="1"/>
           <p:nvPr/>
         </p:nvSpPr>
@@ -7533,65 +8970,21 @@
                 </a:solidFill>
                 <a:latin typeface="Calibri"/>
               </a:rPr>
-              <a:t>ACUERDOS DEL CURSO</a:t>
-            </a:r>
-          </a:p>
-        </p:txBody>
-      </p:sp>
-      <p:sp>
-        <p:nvSpPr>
-          <p:cNvPr id="4" name="Rounded Rectangle 3"/>
-          <p:cNvSpPr/>
-          <p:nvPr/>
-        </p:nvSpPr>
-        <p:spPr>
-          <a:xfrm>
-            <a:off x="640080" y="1737360"/>
-            <a:ext cx="10911535" cy="969264"/>
-          </a:xfrm>
-          <a:prstGeom prst="roundRect">
-            <a:avLst/>
-          </a:prstGeom>
-          <a:solidFill>
-            <a:srgbClr val="E8F5EC"/>
-          </a:solidFill>
-          <a:ln>
-            <a:noFill/>
-          </a:ln>
-          <a:effectLst/>
-        </p:spPr>
-        <p:style>
-          <a:lnRef idx="1">
-            <a:schemeClr val="accent1"/>
-          </a:lnRef>
-          <a:fillRef idx="3">
-            <a:schemeClr val="accent1"/>
-          </a:fillRef>
-          <a:effectRef idx="2">
-            <a:schemeClr val="accent1"/>
-          </a:effectRef>
-          <a:fontRef idx="minor">
-            <a:schemeClr val="lt1"/>
-          </a:fontRef>
-        </p:style>
-        <p:txBody>
-          <a:bodyPr rtlCol="0" anchor="ctr"/>
-          <a:lstStyle/>
-          <a:p>
-            <a:pPr algn="ctr"/>
-          </a:p>
-        </p:txBody>
-      </p:sp>
-      <p:sp>
-        <p:nvSpPr>
-          <p:cNvPr id="5" name="TextBox 4"/>
+              <a:t>ALCANCE DE LA EVALUACIÓN</a:t>
+            </a:r>
+          </a:p>
+        </p:txBody>
+      </p:sp>
+      <p:sp>
+        <p:nvSpPr>
+          <p:cNvPr id="4" name="TextBox 3"/>
           <p:cNvSpPr txBox="1"/>
           <p:nvPr/>
         </p:nvSpPr>
         <p:spPr>
           <a:xfrm>
-            <a:off x="868680" y="1847088"/>
-            <a:ext cx="10454335" cy="749808"/>
+            <a:off x="640080" y="1691639"/>
+            <a:ext cx="10911535" cy="4617720"/>
           </a:xfrm>
           <a:prstGeom prst="rect">
             <a:avLst/>
@@ -7604,21 +8997,62 @@
           </a:bodyPr>
           <a:lstStyle/>
           <a:p>
+            <a:pPr>
+              <a:spcAft>
+                <a:spcPts val="1000"/>
+              </a:spcAft>
+            </a:pPr>
+            <a:r>
+              <a:rPr sz="1300" b="0" i="0">
+                <a:solidFill>
+                  <a:srgbClr val="2B2B2B"/>
+                </a:solidFill>
+                <a:latin typeface="Calibri"/>
+              </a:rPr>
+              <a:t>–   </a:t>
+            </a:r>
             <a:r>
               <a:rPr sz="1300" b="1" i="0">
                 <a:solidFill>
-                  <a:srgbClr val="0C2340"/>
-                </a:solidFill>
-                <a:latin typeface="Calibri"/>
-              </a:rPr>
-              <a:t>ℹ️ Nota institucional</a:t>
+                  <a:srgbClr val="2B2B2B"/>
+                </a:solidFill>
+                <a:latin typeface="Calibri"/>
+              </a:rPr>
+              <a:t>Régimen:</a:t>
+            </a:r>
+            <a:r>
+              <a:rPr sz="1300" b="0" i="0">
+                <a:solidFill>
+                  <a:srgbClr val="2B2B2B"/>
+                </a:solidFill>
+                <a:latin typeface="Calibri"/>
+              </a:rPr>
+              <a:t> Art. 52 del Reglamento Estudiantil · </a:t>
+            </a:r>
+            <a:r>
+              <a:rPr sz="1300" b="1" i="0">
+                <a:solidFill>
+                  <a:srgbClr val="2B2B2B"/>
+                </a:solidFill>
+                <a:latin typeface="Calibri"/>
+              </a:rPr>
+              <a:t>Corte 1 = 30% · Corte 2 = 30% · Corte 3 = 40%</a:t>
+            </a:r>
+            <a:r>
+              <a:rPr sz="1300" b="0" i="0">
+                <a:solidFill>
+                  <a:srgbClr val="2B2B2B"/>
+                </a:solidFill>
+                <a:latin typeface="Calibri"/>
+              </a:rPr>
+              <a:t>.</a:t>
             </a:r>
           </a:p>
           <a:p>
             <a:pPr>
-              <a:spcBef>
-                <a:spcPts val="400"/>
-              </a:spcBef>
+              <a:spcAft>
+                <a:spcPts val="1000"/>
+              </a:spcAft>
             </a:pPr>
             <a:r>
               <a:rPr sz="1300" b="0" i="0">
@@ -7627,7 +9061,7 @@
                 </a:solidFill>
                 <a:latin typeface="Calibri"/>
               </a:rPr>
-              <a:t>Encuentro sincrónico: </a:t>
+              <a:t>–   </a:t>
             </a:r>
             <a:r>
               <a:rPr sz="1300" b="1" i="0">
@@ -7636,7 +9070,7 @@
                 </a:solidFill>
                 <a:latin typeface="Calibri"/>
               </a:rPr>
-              <a:t>Jueves, 5:00 pm – 6:00 pm</a:t>
+              <a:t>Cada corte se compone de ítems concretos del aula</a:t>
             </a:r>
             <a:r>
               <a:rPr sz="1300" b="0" i="0">
@@ -7645,92 +9079,84 @@
                 </a:solidFill>
                 <a:latin typeface="Calibri"/>
               </a:rPr>
-              <a:t> por Google Meet. El enlace se publica en el aula virtual.</a:t>
-            </a:r>
-          </a:p>
-        </p:txBody>
-      </p:sp>
-      <p:sp>
-        <p:nvSpPr>
-          <p:cNvPr id="6" name="Rounded Rectangle 5"/>
-          <p:cNvSpPr/>
-          <p:nvPr/>
-        </p:nvSpPr>
-        <p:spPr>
-          <a:xfrm>
-            <a:off x="640080" y="2935224"/>
-            <a:ext cx="10911535" cy="969264"/>
-          </a:xfrm>
-          <a:prstGeom prst="roundRect">
-            <a:avLst/>
-          </a:prstGeom>
-          <a:solidFill>
-            <a:srgbClr val="FDECD8"/>
-          </a:solidFill>
-          <a:ln>
-            <a:noFill/>
-          </a:ln>
-          <a:effectLst/>
-        </p:spPr>
-        <p:style>
-          <a:lnRef idx="1">
-            <a:schemeClr val="accent1"/>
-          </a:lnRef>
-          <a:fillRef idx="3">
-            <a:schemeClr val="accent1"/>
-          </a:fillRef>
-          <a:effectRef idx="2">
-            <a:schemeClr val="accent1"/>
-          </a:effectRef>
-          <a:fontRef idx="minor">
-            <a:schemeClr val="lt1"/>
-          </a:fontRef>
-        </p:style>
-        <p:txBody>
-          <a:bodyPr rtlCol="0" anchor="ctr"/>
-          <a:lstStyle/>
-          <a:p>
-            <a:pPr algn="ctr"/>
-          </a:p>
-        </p:txBody>
-      </p:sp>
-      <p:sp>
-        <p:nvSpPr>
-          <p:cNvPr id="7" name="TextBox 6"/>
-          <p:cNvSpPr txBox="1"/>
-          <p:nvPr/>
-        </p:nvSpPr>
-        <p:spPr>
-          <a:xfrm>
-            <a:off x="868680" y="3044952"/>
-            <a:ext cx="10454335" cy="749808"/>
-          </a:xfrm>
-          <a:prstGeom prst="rect">
-            <a:avLst/>
-          </a:prstGeom>
-          <a:noFill/>
-        </p:spPr>
-        <p:txBody>
-          <a:bodyPr wrap="square" anchor="t" lIns="0" rIns="0" tIns="0" bIns="0">
-            <a:spAutoFit/>
-          </a:bodyPr>
-          <a:lstStyle/>
-          <a:p>
+              <a:t> — nombre exacto, tipo de actividad, peso y cierre: en la tabla «CÓMO SE CALIFICA» de esta presentación.</a:t>
+            </a:r>
+          </a:p>
+          <a:p>
+            <a:pPr>
+              <a:spcAft>
+                <a:spcPts val="1000"/>
+              </a:spcAft>
+            </a:pPr>
+            <a:r>
+              <a:rPr sz="1300" b="0" i="0">
+                <a:solidFill>
+                  <a:srgbClr val="2B2B2B"/>
+                </a:solidFill>
+                <a:latin typeface="Calibri"/>
+              </a:rPr>
+              <a:t>–   </a:t>
+            </a:r>
             <a:r>
               <a:rPr sz="1300" b="1" i="0">
                 <a:solidFill>
-                  <a:srgbClr val="0C2340"/>
-                </a:solidFill>
-                <a:latin typeface="Calibri"/>
-              </a:rPr>
-              <a:t>💡 Aclaración</a:t>
+                  <a:srgbClr val="2B2B2B"/>
+                </a:solidFill>
+                <a:latin typeface="Calibri"/>
+              </a:rPr>
+              <a:t>Autoevaluación (1,6%, cuestionario)</a:t>
+            </a:r>
+            <a:r>
+              <a:rPr sz="1300" b="0" i="0">
+                <a:solidFill>
+                  <a:srgbClr val="2B2B2B"/>
+                </a:solidFill>
+                <a:latin typeface="Calibri"/>
+              </a:rPr>
+              <a:t> y </a:t>
+            </a:r>
+            <a:r>
+              <a:rPr sz="1300" b="1" i="0">
+                <a:solidFill>
+                  <a:srgbClr val="2B2B2B"/>
+                </a:solidFill>
+                <a:latin typeface="Calibri"/>
+              </a:rPr>
+              <a:t>coevaluación (1,6%, foro)</a:t>
+            </a:r>
+            <a:r>
+              <a:rPr sz="1300" b="0" i="0">
+                <a:solidFill>
+                  <a:srgbClr val="2B2B2B"/>
+                </a:solidFill>
+                <a:latin typeface="Calibri"/>
+              </a:rPr>
+              <a:t> </a:t>
+            </a:r>
+            <a:r>
+              <a:rPr sz="1300" b="1" i="0">
+                <a:solidFill>
+                  <a:srgbClr val="2B2B2B"/>
+                </a:solidFill>
+                <a:latin typeface="Calibri"/>
+              </a:rPr>
+              <a:t>sí hacen parte</a:t>
+            </a:r>
+            <a:r>
+              <a:rPr sz="1300" b="0" i="0">
+                <a:solidFill>
+                  <a:srgbClr val="2B2B2B"/>
+                </a:solidFill>
+                <a:latin typeface="Calibri"/>
+              </a:rPr>
+              <a:t> de la nota de este curso: van en el tercer corte y se diligencian/participan en el aula.</a:t>
             </a:r>
           </a:p>
           <a:p>
             <a:pPr>
-              <a:spcBef>
-                <a:spcPts val="400"/>
-              </a:spcBef>
+              <a:spcAft>
+                <a:spcPts val="1000"/>
+              </a:spcAft>
             </a:pPr>
             <a:r>
               <a:rPr sz="1300" b="0" i="0">
@@ -7739,7 +9165,7 @@
                 </a:solidFill>
                 <a:latin typeface="Calibri"/>
               </a:rPr>
-              <a:t>Si el día de clase es festivo colombiano, la sesión NO se cancela: se cursa como </a:t>
+              <a:t>–   Los </a:t>
             </a:r>
             <a:r>
               <a:rPr sz="1300" b="1" i="0">
@@ -7748,7 +9174,7 @@
                 </a:solidFill>
                 <a:latin typeface="Calibri"/>
               </a:rPr>
-              <a:t>clase autónoma</a:t>
+              <a:t>quices y parciales</a:t>
             </a:r>
             <a:r>
               <a:rPr sz="1300" b="0" i="0">
@@ -7757,92 +9183,32 @@
                 </a:solidFill>
                 <a:latin typeface="Calibri"/>
               </a:rPr>
-              <a:t> (material/actividad en el CDigital).</a:t>
-            </a:r>
-          </a:p>
-        </p:txBody>
-      </p:sp>
-      <p:sp>
-        <p:nvSpPr>
-          <p:cNvPr id="8" name="Rounded Rectangle 7"/>
-          <p:cNvSpPr/>
-          <p:nvPr/>
-        </p:nvSpPr>
-        <p:spPr>
-          <a:xfrm>
-            <a:off x="640080" y="4133087"/>
-            <a:ext cx="10911535" cy="713232"/>
-          </a:xfrm>
-          <a:prstGeom prst="roundRect">
-            <a:avLst/>
-          </a:prstGeom>
-          <a:solidFill>
-            <a:srgbClr val="FBE4E4"/>
-          </a:solidFill>
-          <a:ln>
-            <a:noFill/>
-          </a:ln>
-          <a:effectLst/>
-        </p:spPr>
-        <p:style>
-          <a:lnRef idx="1">
-            <a:schemeClr val="accent1"/>
-          </a:lnRef>
-          <a:fillRef idx="3">
-            <a:schemeClr val="accent1"/>
-          </a:fillRef>
-          <a:effectRef idx="2">
-            <a:schemeClr val="accent1"/>
-          </a:effectRef>
-          <a:fontRef idx="minor">
-            <a:schemeClr val="lt1"/>
-          </a:fontRef>
-        </p:style>
-        <p:txBody>
-          <a:bodyPr rtlCol="0" anchor="ctr"/>
-          <a:lstStyle/>
-          <a:p>
-            <a:pPr algn="ctr"/>
-          </a:p>
-        </p:txBody>
-      </p:sp>
-      <p:sp>
-        <p:nvSpPr>
-          <p:cNvPr id="9" name="TextBox 8"/>
-          <p:cNvSpPr txBox="1"/>
-          <p:nvPr/>
-        </p:nvSpPr>
-        <p:spPr>
-          <a:xfrm>
-            <a:off x="868680" y="4242816"/>
-            <a:ext cx="10454335" cy="493776"/>
-          </a:xfrm>
-          <a:prstGeom prst="rect">
-            <a:avLst/>
-          </a:prstGeom>
-          <a:noFill/>
-        </p:spPr>
-        <p:txBody>
-          <a:bodyPr wrap="square" anchor="t" lIns="0" rIns="0" tIns="0" bIns="0">
-            <a:spAutoFit/>
-          </a:bodyPr>
-          <a:lstStyle/>
-          <a:p>
+              <a:t> son cuestionarios en CDigital y cierran en día de clase; la </a:t>
+            </a:r>
             <a:r>
               <a:rPr sz="1300" b="1" i="0">
                 <a:solidFill>
-                  <a:srgbClr val="0C2340"/>
-                </a:solidFill>
-                <a:latin typeface="Calibri"/>
-              </a:rPr>
-              <a:t>⚠️ Importante</a:t>
+                  <a:srgbClr val="2B2B2B"/>
+                </a:solidFill>
+                <a:latin typeface="Calibri"/>
+              </a:rPr>
+              <a:t>ACA Final</a:t>
+            </a:r>
+            <a:r>
+              <a:rPr sz="1300" b="0" i="0">
+                <a:solidFill>
+                  <a:srgbClr val="2B2B2B"/>
+                </a:solidFill>
+                <a:latin typeface="Calibri"/>
+              </a:rPr>
+              <a:t> es una tarea (documento) y cierra en la fecha máxima de recepción.</a:t>
             </a:r>
           </a:p>
           <a:p>
             <a:pPr>
-              <a:spcBef>
-                <a:spcPts val="400"/>
-              </a:spcBef>
+              <a:spcAft>
+                <a:spcPts val="1000"/>
+              </a:spcAft>
             </a:pPr>
             <a:r>
               <a:rPr sz="1300" b="0" i="0">
@@ -7851,14 +9217,100 @@
                 </a:solidFill>
                 <a:latin typeface="Calibri"/>
               </a:rPr>
-              <a:t>El producto final se construye desde la semana 1 — no es una entrega sorpresa al cierre.</a:t>
-            </a:r>
-          </a:p>
-        </p:txBody>
-      </p:sp>
-      <p:sp>
-        <p:nvSpPr>
-          <p:cNvPr id="10" name="TextBox 9"/>
+              <a:t>–   No confundir con la autoevaluación </a:t>
+            </a:r>
+            <a:r>
+              <a:rPr sz="1300" b="1" i="0">
+                <a:solidFill>
+                  <a:srgbClr val="2B2B2B"/>
+                </a:solidFill>
+                <a:latin typeface="Calibri"/>
+              </a:rPr>
+              <a:t>institucional</a:t>
+            </a:r>
+            <a:r>
+              <a:rPr sz="1300" b="0" i="0">
+                <a:solidFill>
+                  <a:srgbClr val="2B2B2B"/>
+                </a:solidFill>
+                <a:latin typeface="Calibri"/>
+              </a:rPr>
+              <a:t> SIAC (calidad de programas en acreditacion.cun.edu.co): esa no es una nota del curso.</a:t>
+            </a:r>
+          </a:p>
+          <a:p>
+            <a:pPr>
+              <a:spcAft>
+                <a:spcPts val="1000"/>
+              </a:spcAft>
+            </a:pPr>
+            <a:r>
+              <a:rPr sz="1300" b="0" i="0">
+                <a:solidFill>
+                  <a:srgbClr val="2B2B2B"/>
+                </a:solidFill>
+                <a:latin typeface="Calibri"/>
+              </a:rPr>
+              <a:t>–   Entregas, rúbricas y publicación de notas: solo por </a:t>
+            </a:r>
+            <a:r>
+              <a:rPr sz="1300" b="1" i="0">
+                <a:solidFill>
+                  <a:srgbClr val="2B2B2B"/>
+                </a:solidFill>
+                <a:latin typeface="Calibri"/>
+              </a:rPr>
+              <a:t>CDigital</a:t>
+            </a:r>
+            <a:r>
+              <a:rPr sz="1300" b="0" i="0">
+                <a:solidFill>
+                  <a:srgbClr val="2B2B2B"/>
+                </a:solidFill>
+                <a:latin typeface="Calibri"/>
+              </a:rPr>
+              <a:t>.</a:t>
+            </a:r>
+          </a:p>
+          <a:p>
+            <a:pPr>
+              <a:spcAft>
+                <a:spcPts val="1000"/>
+              </a:spcAft>
+            </a:pPr>
+            <a:r>
+              <a:rPr sz="1300" b="0" i="0">
+                <a:solidFill>
+                  <a:srgbClr val="2B2B2B"/>
+                </a:solidFill>
+                <a:latin typeface="Calibri"/>
+              </a:rPr>
+              <a:t>–   Si un peso o una ventana del aula no coincide con este material, </a:t>
+            </a:r>
+            <a:r>
+              <a:rPr sz="1300" b="1" i="0">
+                <a:solidFill>
+                  <a:srgbClr val="2B2B2B"/>
+                </a:solidFill>
+                <a:latin typeface="Calibri"/>
+              </a:rPr>
+              <a:t>manda el aula</a:t>
+            </a:r>
+            <a:r>
+              <a:rPr sz="1300" b="0" i="0">
+                <a:solidFill>
+                  <a:srgbClr val="2B2B2B"/>
+                </a:solidFill>
+                <a:latin typeface="Calibri"/>
+              </a:rPr>
+              <a:t>: se corrige aquí y se avisa en clase.</a:t>
+            </a:r>
+          </a:p>
+        </p:txBody>
+      </p:sp>
+      <p:sp>
+        <p:nvSpPr>
+          <p:cNvPr id="5" name="TextBox 4"/>
           <p:cNvSpPr txBox="1"/>
           <p:nvPr/>
         </p:nvSpPr>

--- a/Pregrado/Investigacion en ciencia y tecnologia/Clases/Presentacion del Curso - Investigacion Ciencia y Tecnologia.pptx
+++ b/Pregrado/Investigacion en ciencia y tecnologia/Clases/Presentacion del Curso - Investigacion Ciencia y Tecnologia.pptx
@@ -6310,7 +6310,7 @@
                 </a:solidFill>
                 <a:latin typeface="Calibri"/>
               </a:rPr>
-              <a:t> — Identificación de problemas y pregunta de investigación.</a:t>
+              <a:t> — Problema y pregunta · bases de datos y gestores de citas.</a:t>
             </a:r>
           </a:p>
           <a:p>
@@ -6344,7 +6344,7 @@
                 </a:solidFill>
                 <a:latin typeface="Calibri"/>
               </a:rPr>
-              <a:t> — Formulación del planteamiento del problema.</a:t>
+              <a:t> — Planteamiento del problema · marco teórico y revisión de literatura.</a:t>
             </a:r>
           </a:p>
           <a:p>
@@ -6378,7 +6378,7 @@
                 </a:solidFill>
                 <a:latin typeface="Calibri"/>
               </a:rPr>
-              <a:t> — Bases de datos CUN · gestores · marco teórico y revisión (U8+U10–12).</a:t>
+              <a:t> — Socialización del artículo y cierre del curso.</a:t>
             </a:r>
           </a:p>
         </p:txBody>
@@ -8586,7 +8586,7 @@
                           </a:solidFill>
                           <a:latin typeface="Calibri"/>
                         </a:rPr>
-                        <a:t>17/09/2026</a:t>
+                        <a:t>12/09/2026</a:t>
                       </a:r>
                     </a:p>
                   </a:txBody>

--- a/Pregrado/Investigacion en ciencia y tecnologia/Clases/Presentacion del Curso - Investigacion Ciencia y Tecnologia.pptx
+++ b/Pregrado/Investigacion en ciencia y tecnologia/Clases/Presentacion del Curso - Investigacion Ciencia y Tecnologia.pptx
@@ -3784,7 +3784,7 @@
         <p:spPr>
           <a:xfrm>
             <a:off x="640080" y="2935224"/>
-            <a:ext cx="10911535" cy="969264"/>
+            <a:ext cx="10911535" cy="1225296"/>
           </a:xfrm>
           <a:prstGeom prst="roundRect">
             <a:avLst/>
@@ -3828,7 +3828,7 @@
         <p:spPr>
           <a:xfrm>
             <a:off x="868680" y="3044952"/>
-            <a:ext cx="10454335" cy="749808"/>
+            <a:ext cx="10454335" cy="1005840"/>
           </a:xfrm>
           <a:prstGeom prst="rect">
             <a:avLst/>
@@ -3882,7 +3882,43 @@
                 </a:solidFill>
                 <a:latin typeface="Calibri"/>
               </a:rPr>
-              <a:t> (material/actividad en el CDigital).</a:t>
+              <a:t> y la actividad y el material quedan en la </a:t>
+            </a:r>
+            <a:r>
+              <a:rPr sz="1300" b="1" i="0">
+                <a:solidFill>
+                  <a:srgbClr val="2B2B2B"/>
+                </a:solidFill>
+                <a:latin typeface="Calibri"/>
+              </a:rPr>
+              <a:t>carpeta de esa sesión en el Drive de clases</a:t>
+            </a:r>
+            <a:r>
+              <a:rPr sz="1300" b="0" i="0">
+                <a:solidFill>
+                  <a:srgbClr val="2B2B2B"/>
+                </a:solidFill>
+                <a:latin typeface="Calibri"/>
+              </a:rPr>
+              <a:t> (`Clases/Sesion NN - …/`); la entrega y la nota siguen en </a:t>
+            </a:r>
+            <a:r>
+              <a:rPr sz="1300" b="1" i="0">
+                <a:solidFill>
+                  <a:srgbClr val="2B2B2B"/>
+                </a:solidFill>
+                <a:latin typeface="Calibri"/>
+              </a:rPr>
+              <a:t>CDigital</a:t>
+            </a:r>
+            <a:r>
+              <a:rPr sz="1300" b="0" i="0">
+                <a:solidFill>
+                  <a:srgbClr val="2B2B2B"/>
+                </a:solidFill>
+                <a:latin typeface="Calibri"/>
+              </a:rPr>
+              <a:t>.</a:t>
             </a:r>
           </a:p>
         </p:txBody>
@@ -3895,7 +3931,7 @@
         </p:nvSpPr>
         <p:spPr>
           <a:xfrm>
-            <a:off x="640080" y="4133087"/>
+            <a:off x="640080" y="4389120"/>
             <a:ext cx="10911535" cy="713232"/>
           </a:xfrm>
           <a:prstGeom prst="roundRect">
@@ -3939,7 +3975,7 @@
         </p:nvSpPr>
         <p:spPr>
           <a:xfrm>
-            <a:off x="868680" y="4242816"/>
+            <a:off x="868680" y="4498848"/>
             <a:ext cx="10454335" cy="493776"/>
           </a:xfrm>
           <a:prstGeom prst="rect">
@@ -4284,6 +4320,76 @@
                 </a:solidFill>
                 <a:latin typeface="Calibri"/>
               </a:rPr>
+              <a:t>Material de clases (Drive):</a:t>
+            </a:r>
+            <a:r>
+              <a:rPr sz="1600" b="0" i="0">
+                <a:solidFill>
+                  <a:srgbClr val="2B2B2B"/>
+                </a:solidFill>
+                <a:latin typeface="Calibri"/>
+              </a:rPr>
+              <a:t> </a:t>
+            </a:r>
+            <a:r>
+              <a:rPr sz="1600" b="1" i="0">
+                <a:solidFill>
+                  <a:srgbClr val="2B2B2B"/>
+                </a:solidFill>
+                <a:latin typeface="Calibri"/>
+              </a:rPr>
+              <a:t>[URL Material de clases — carpeta Clases/ en Drive · Investigación C&amp;T]</a:t>
+            </a:r>
+            <a:r>
+              <a:rPr sz="1600" b="0" i="0">
+                <a:solidFill>
+                  <a:srgbClr val="2B2B2B"/>
+                </a:solidFill>
+                <a:latin typeface="Calibri"/>
+              </a:rPr>
+              <a:t> — aquí está el material de cada sesión, incluida la de una </a:t>
+            </a:r>
+            <a:r>
+              <a:rPr sz="1600" b="1" i="0">
+                <a:solidFill>
+                  <a:srgbClr val="2B2B2B"/>
+                </a:solidFill>
+                <a:latin typeface="Calibri"/>
+              </a:rPr>
+              <a:t>clase autónoma</a:t>
+            </a:r>
+            <a:r>
+              <a:rPr sz="1600" b="0" i="0">
+                <a:solidFill>
+                  <a:srgbClr val="2B2B2B"/>
+                </a:solidFill>
+                <a:latin typeface="Calibri"/>
+              </a:rPr>
+              <a:t>.</a:t>
+            </a:r>
+          </a:p>
+          <a:p>
+            <a:pPr>
+              <a:spcAft>
+                <a:spcPts val="1000"/>
+              </a:spcAft>
+            </a:pPr>
+            <a:r>
+              <a:rPr sz="1600" b="0" i="0">
+                <a:solidFill>
+                  <a:srgbClr val="2B2B2B"/>
+                </a:solidFill>
+                <a:latin typeface="Calibri"/>
+              </a:rPr>
+              <a:t>–   </a:t>
+            </a:r>
+            <a:r>
+              <a:rPr sz="1600" b="1" i="0">
+                <a:solidFill>
+                  <a:srgbClr val="2B2B2B"/>
+                </a:solidFill>
+                <a:latin typeface="Calibri"/>
+              </a:rPr>
               <a:t>Plantilla APA CUN – Proyecto de Grado</a:t>
             </a:r>
             <a:r>
@@ -5198,7 +5304,7 @@
                 </a:solidFill>
                 <a:latin typeface="Calibri"/>
               </a:rPr>
-              <a:t>Escanea o abre:</a:t>
+              <a:t>Escanea el QR o abre:</a:t>
             </a:r>
             <a:r>
               <a:rPr sz="1400" b="0" i="0">
@@ -5223,7 +5329,7 @@
                 </a:solidFill>
                 <a:latin typeface="Calibri"/>
               </a:rPr>
-              <a:t>–   Post-it: </a:t>
+              <a:t>–   En un post-it escribe: </a:t>
             </a:r>
             <a:r>
               <a:rPr sz="1400" b="1" i="0">
@@ -5232,7 +5338,7 @@
                 </a:solidFill>
                 <a:latin typeface="Calibri"/>
               </a:rPr>
-              <a:t>nombre</a:t>
+              <a:t>tu nombre</a:t>
             </a:r>
             <a:r>
               <a:rPr sz="1400" b="0" i="0">
@@ -5259,7 +5365,7 @@
                 </a:solidFill>
                 <a:latin typeface="Calibri"/>
               </a:rPr>
-              <a:t> + </a:t>
+              <a:t> + una </a:t>
             </a:r>
             <a:r>
               <a:rPr sz="1400" b="1" i="0">
@@ -5293,7 +5399,7 @@
                 </a:solidFill>
                 <a:latin typeface="Calibri"/>
               </a:rPr>
-              <a:t>–   Tablero oficial: </a:t>
+              <a:t>–   </a:t>
             </a:r>
             <a:r>
               <a:rPr sz="1400" b="1" i="0">
@@ -5302,7 +5408,7 @@
                 </a:solidFill>
                 <a:latin typeface="Calibri"/>
               </a:rPr>
-              <a:t>Padlet</a:t>
+              <a:t>Ahora, ~7 min.</a:t>
             </a:r>
             <a:r>
               <a:rPr sz="1400" b="0" i="0">
@@ -5311,7 +5417,7 @@
                 </a:solidFill>
                 <a:latin typeface="Calibri"/>
               </a:rPr>
-              <a:t> (mismo enlace en los 5 cursos).</a:t>
+              <a:t> Somos 20: el muro se lee entero y nadie queda sin ser visto.</a:t>
             </a:r>
           </a:p>
           <a:p>
@@ -5327,7 +5433,7 @@
                 </a:solidFill>
                 <a:latin typeface="Calibri"/>
               </a:rPr>
-              <a:t>–   Ahora (~7 min). Leemos juntos 3–4 notas (sin juzgar).</a:t>
+              <a:t>–   Después las leemos en voz alta y agrupamos expectativas — sin juzgar: de ahí salen los ejemplos con los que trabajamos el resto del curso.</a:t>
             </a:r>
           </a:p>
         </p:txBody>
